--- a/Polar PPT.pptx
+++ b/Polar PPT.pptx
@@ -4,8 +4,18 @@
   <p:sldMasterIdLst>
     <p:sldMasterId id="2147483648" r:id="rId1"/>
   </p:sldMasterIdLst>
+  <p:handoutMasterIdLst>
+    <p:handoutMasterId r:id="rId10"/>
+  </p:handoutMasterIdLst>
   <p:sldIdLst>
     <p:sldId id="256" r:id="rId2"/>
+    <p:sldId id="257" r:id="rId3"/>
+    <p:sldId id="259" r:id="rId4"/>
+    <p:sldId id="266" r:id="rId5"/>
+    <p:sldId id="258" r:id="rId6"/>
+    <p:sldId id="262" r:id="rId7"/>
+    <p:sldId id="263" r:id="rId8"/>
+    <p:sldId id="264" r:id="rId9"/>
   </p:sldIdLst>
   <p:sldSz cx="12192000" cy="6858000"/>
   <p:notesSz cx="6858000" cy="9144000"/>
@@ -104,7 +114,201 @@
       </a:defRPr>
     </a:lvl9pPr>
   </p:defaultTextStyle>
+  <p:extLst>
+    <p:ext uri="{EFAFB233-063F-42B5-8137-9DF3F51BA10A}">
+      <p15:sldGuideLst xmlns:p15="http://schemas.microsoft.com/office/powerpoint/2012/main"/>
+    </p:ext>
+  </p:extLst>
 </p:presentation>
+</file>
+
+<file path=ppt/handoutMasters/handoutMaster1.xml><?xml version="1.0" encoding="utf-8"?>
+<p:handoutMaster xmlns:a="http://schemas.openxmlformats.org/drawingml/2006/main" xmlns:r="http://schemas.openxmlformats.org/officeDocument/2006/relationships" xmlns:p="http://schemas.openxmlformats.org/presentationml/2006/main">
+  <p:cSld>
+    <p:bg>
+      <p:bgRef idx="1001">
+        <a:schemeClr val="bg1"/>
+      </p:bgRef>
+    </p:bg>
+    <p:spTree>
+      <p:nvGrpSpPr>
+        <p:cNvPr id="1" name=""/>
+        <p:cNvGrpSpPr/>
+        <p:nvPr/>
+      </p:nvGrpSpPr>
+      <p:grpSpPr>
+        <a:xfrm>
+          <a:off x="0" y="0"/>
+          <a:ext cx="0" cy="0"/>
+          <a:chOff x="0" y="0"/>
+          <a:chExt cx="0" cy="0"/>
+        </a:xfrm>
+      </p:grpSpPr>
+      <p:sp>
+        <p:nvSpPr>
+          <p:cNvPr id="2" name="머리글 개체 틀 1">
+            <a:extLst>
+              <a:ext uri="{FF2B5EF4-FFF2-40B4-BE49-F238E27FC236}">
+                <a16:creationId xmlns:a16="http://schemas.microsoft.com/office/drawing/2014/main" id="{95441322-D702-0349-EEB6-6A4B99B9896B}"/>
+              </a:ext>
+            </a:extLst>
+          </p:cNvPr>
+          <p:cNvSpPr>
+            <a:spLocks noGrp="1"/>
+          </p:cNvSpPr>
+          <p:nvPr>
+            <p:ph type="hdr" sz="quarter"/>
+          </p:nvPr>
+        </p:nvSpPr>
+        <p:spPr>
+          <a:xfrm>
+            <a:off x="0" y="0"/>
+            <a:ext cx="2971800" cy="458788"/>
+          </a:xfrm>
+          <a:prstGeom prst="rect">
+            <a:avLst/>
+          </a:prstGeom>
+        </p:spPr>
+        <p:txBody>
+          <a:bodyPr vert="horz" lIns="91440" tIns="45720" rIns="91440" bIns="45720" rtlCol="0"/>
+          <a:lstStyle>
+            <a:lvl1pPr algn="l">
+              <a:defRPr sz="1200"/>
+            </a:lvl1pPr>
+          </a:lstStyle>
+          <a:p>
+            <a:endParaRPr lang="ko-KR" altLang="en-US"/>
+          </a:p>
+        </p:txBody>
+      </p:sp>
+      <p:sp>
+        <p:nvSpPr>
+          <p:cNvPr id="3" name="날짜 개체 틀 2">
+            <a:extLst>
+              <a:ext uri="{FF2B5EF4-FFF2-40B4-BE49-F238E27FC236}">
+                <a16:creationId xmlns:a16="http://schemas.microsoft.com/office/drawing/2014/main" id="{78A0C483-305C-FFAE-068C-BAFFC8148F35}"/>
+              </a:ext>
+            </a:extLst>
+          </p:cNvPr>
+          <p:cNvSpPr>
+            <a:spLocks noGrp="1"/>
+          </p:cNvSpPr>
+          <p:nvPr>
+            <p:ph type="dt" sz="quarter" idx="1"/>
+          </p:nvPr>
+        </p:nvSpPr>
+        <p:spPr>
+          <a:xfrm>
+            <a:off x="3884613" y="0"/>
+            <a:ext cx="2971800" cy="458788"/>
+          </a:xfrm>
+          <a:prstGeom prst="rect">
+            <a:avLst/>
+          </a:prstGeom>
+        </p:spPr>
+        <p:txBody>
+          <a:bodyPr vert="horz" lIns="91440" tIns="45720" rIns="91440" bIns="45720" rtlCol="0"/>
+          <a:lstStyle>
+            <a:lvl1pPr algn="r">
+              <a:defRPr sz="1200"/>
+            </a:lvl1pPr>
+          </a:lstStyle>
+          <a:p>
+            <a:fld id="{6BA27AB0-FC23-42AB-8479-14FFDD0BF2A6}" type="datetimeFigureOut">
+              <a:rPr lang="ko-KR" altLang="en-US" smtClean="0"/>
+              <a:t>2026-04-25</a:t>
+            </a:fld>
+            <a:endParaRPr lang="ko-KR" altLang="en-US"/>
+          </a:p>
+        </p:txBody>
+      </p:sp>
+      <p:sp>
+        <p:nvSpPr>
+          <p:cNvPr id="4" name="바닥글 개체 틀 3">
+            <a:extLst>
+              <a:ext uri="{FF2B5EF4-FFF2-40B4-BE49-F238E27FC236}">
+                <a16:creationId xmlns:a16="http://schemas.microsoft.com/office/drawing/2014/main" id="{3C01CE5F-681B-EEB9-B07C-35C37DF9F837}"/>
+              </a:ext>
+            </a:extLst>
+          </p:cNvPr>
+          <p:cNvSpPr>
+            <a:spLocks noGrp="1"/>
+          </p:cNvSpPr>
+          <p:nvPr>
+            <p:ph type="ftr" sz="quarter" idx="2"/>
+          </p:nvPr>
+        </p:nvSpPr>
+        <p:spPr>
+          <a:xfrm>
+            <a:off x="0" y="8685213"/>
+            <a:ext cx="2971800" cy="458787"/>
+          </a:xfrm>
+          <a:prstGeom prst="rect">
+            <a:avLst/>
+          </a:prstGeom>
+        </p:spPr>
+        <p:txBody>
+          <a:bodyPr vert="horz" lIns="91440" tIns="45720" rIns="91440" bIns="45720" rtlCol="0" anchor="b"/>
+          <a:lstStyle>
+            <a:lvl1pPr algn="l">
+              <a:defRPr sz="1200"/>
+            </a:lvl1pPr>
+          </a:lstStyle>
+          <a:p>
+            <a:endParaRPr lang="ko-KR" altLang="en-US"/>
+          </a:p>
+        </p:txBody>
+      </p:sp>
+      <p:sp>
+        <p:nvSpPr>
+          <p:cNvPr id="5" name="슬라이드 번호 개체 틀 4">
+            <a:extLst>
+              <a:ext uri="{FF2B5EF4-FFF2-40B4-BE49-F238E27FC236}">
+                <a16:creationId xmlns:a16="http://schemas.microsoft.com/office/drawing/2014/main" id="{6E698731-CD16-4F47-6FF6-335ACB0A44A6}"/>
+              </a:ext>
+            </a:extLst>
+          </p:cNvPr>
+          <p:cNvSpPr>
+            <a:spLocks noGrp="1"/>
+          </p:cNvSpPr>
+          <p:nvPr>
+            <p:ph type="sldNum" sz="quarter" idx="3"/>
+          </p:nvPr>
+        </p:nvSpPr>
+        <p:spPr>
+          <a:xfrm>
+            <a:off x="3884613" y="8685213"/>
+            <a:ext cx="2971800" cy="458787"/>
+          </a:xfrm>
+          <a:prstGeom prst="rect">
+            <a:avLst/>
+          </a:prstGeom>
+        </p:spPr>
+        <p:txBody>
+          <a:bodyPr vert="horz" lIns="91440" tIns="45720" rIns="91440" bIns="45720" rtlCol="0" anchor="b"/>
+          <a:lstStyle>
+            <a:lvl1pPr algn="r">
+              <a:defRPr sz="1200"/>
+            </a:lvl1pPr>
+          </a:lstStyle>
+          <a:p>
+            <a:fld id="{C3E307A3-FB32-4FA4-9AAE-1D1BB1BCA067}" type="slidenum">
+              <a:rPr lang="ko-KR" altLang="en-US" smtClean="0"/>
+              <a:t>‹#›</a:t>
+            </a:fld>
+            <a:endParaRPr lang="ko-KR" altLang="en-US"/>
+          </a:p>
+        </p:txBody>
+      </p:sp>
+    </p:spTree>
+    <p:extLst>
+      <p:ext uri="{BB962C8B-B14F-4D97-AF65-F5344CB8AC3E}">
+        <p14:creationId xmlns:p14="http://schemas.microsoft.com/office/powerpoint/2010/main" val="2873144673"/>
+      </p:ext>
+    </p:extLst>
+  </p:cSld>
+  <p:clrMap bg1="lt1" tx1="dk1" bg2="lt2" tx2="dk2" accent1="accent1" accent2="accent2" accent3="accent3" accent4="accent4" accent5="accent5" accent6="accent6" hlink="hlink" folHlink="folHlink"/>
+</p:handoutMaster>
 </file>
 
 <file path=ppt/slideLayouts/slideLayout1.xml><?xml version="1.0" encoding="utf-8"?>
@@ -254,7 +458,7 @@
           <a:p>
             <a:fld id="{722900D1-9152-4EFC-811C-A53380DDB436}" type="datetimeFigureOut">
               <a:rPr lang="ko-KR" altLang="en-US" smtClean="0"/>
-              <a:t>2026-04-24</a:t>
+              <a:t>2026-04-25</a:t>
             </a:fld>
             <a:endParaRPr lang="ko-KR" altLang="en-US"/>
           </a:p>
@@ -452,7 +656,7 @@
           <a:p>
             <a:fld id="{722900D1-9152-4EFC-811C-A53380DDB436}" type="datetimeFigureOut">
               <a:rPr lang="ko-KR" altLang="en-US" smtClean="0"/>
-              <a:t>2026-04-24</a:t>
+              <a:t>2026-04-25</a:t>
             </a:fld>
             <a:endParaRPr lang="ko-KR" altLang="en-US"/>
           </a:p>
@@ -660,7 +864,7 @@
           <a:p>
             <a:fld id="{722900D1-9152-4EFC-811C-A53380DDB436}" type="datetimeFigureOut">
               <a:rPr lang="ko-KR" altLang="en-US" smtClean="0"/>
-              <a:t>2026-04-24</a:t>
+              <a:t>2026-04-25</a:t>
             </a:fld>
             <a:endParaRPr lang="ko-KR" altLang="en-US"/>
           </a:p>
@@ -734,7 +938,7 @@
 </file>
 
 <file path=ppt/slideLayouts/slideLayout2.xml><?xml version="1.0" encoding="utf-8"?>
-<p:sldLayout xmlns:a="http://schemas.openxmlformats.org/drawingml/2006/main" xmlns:r="http://schemas.openxmlformats.org/officeDocument/2006/relationships" xmlns:p="http://schemas.openxmlformats.org/presentationml/2006/main" type="obj" preserve="1">
+<p:sldLayout xmlns:a="http://schemas.openxmlformats.org/drawingml/2006/main" xmlns:r="http://schemas.openxmlformats.org/officeDocument/2006/relationships" xmlns:p="http://schemas.openxmlformats.org/presentationml/2006/main" preserve="1" userDrawn="1">
   <p:cSld name="제목 및 내용">
     <p:spTree>
       <p:nvGrpSpPr>
@@ -766,13 +970,39 @@
             <p:ph type="title"/>
           </p:nvPr>
         </p:nvSpPr>
-        <p:spPr/>
-        <p:txBody>
-          <a:bodyPr/>
-          <a:lstStyle/>
-          <a:p>
-            <a:r>
-              <a:rPr lang="ko-KR" altLang="en-US"/>
+        <p:spPr>
+          <a:xfrm>
+            <a:off x="400345" y="330455"/>
+            <a:ext cx="11391309" cy="472271"/>
+          </a:xfrm>
+        </p:spPr>
+        <p:txBody>
+          <a:bodyPr>
+            <a:noAutofit/>
+          </a:bodyPr>
+          <a:lstStyle>
+            <a:lvl1pPr>
+              <a:defRPr sz="2800">
+                <a:gradFill>
+                  <a:gsLst>
+                    <a:gs pos="0">
+                      <a:srgbClr val="0369A1"/>
+                    </a:gs>
+                    <a:gs pos="100000">
+                      <a:srgbClr val="00B0F0"/>
+                    </a:gs>
+                  </a:gsLst>
+                  <a:lin ang="0" scaled="1"/>
+                </a:gradFill>
+                <a:latin typeface="Pretendard ExtraBold" panose="02000903000000020004" pitchFamily="50" charset="-127"/>
+                <a:ea typeface="Pretendard ExtraBold" panose="02000903000000020004" pitchFamily="50" charset="-127"/>
+                <a:cs typeface="Pretendard ExtraBold" panose="02000903000000020004" pitchFamily="50" charset="-127"/>
+              </a:defRPr>
+            </a:lvl1pPr>
+          </a:lstStyle>
+          <a:p>
+            <a:r>
+              <a:rPr lang="ko-KR" altLang="en-US" dirty="0"/>
               <a:t>마스터 제목 스타일 편집</a:t>
             </a:r>
           </a:p>
@@ -780,141 +1010,183 @@
       </p:sp>
       <p:sp>
         <p:nvSpPr>
-          <p:cNvPr id="3" name="내용 개체 틀 2">
-            <a:extLst>
-              <a:ext uri="{FF2B5EF4-FFF2-40B4-BE49-F238E27FC236}">
-                <a16:creationId xmlns:a16="http://schemas.microsoft.com/office/drawing/2014/main" id="{E852D79B-D764-4CF4-448B-8E63DC8BB3DD}"/>
-              </a:ext>
-            </a:extLst>
-          </p:cNvPr>
-          <p:cNvSpPr>
-            <a:spLocks noGrp="1"/>
-          </p:cNvSpPr>
-          <p:nvPr>
-            <p:ph idx="1"/>
-          </p:nvPr>
-        </p:nvSpPr>
-        <p:spPr/>
-        <p:txBody>
-          <a:bodyPr/>
-          <a:lstStyle/>
+          <p:cNvPr id="9" name="직사각형 8">
+            <a:extLst>
+              <a:ext uri="{FF2B5EF4-FFF2-40B4-BE49-F238E27FC236}">
+                <a16:creationId xmlns:a16="http://schemas.microsoft.com/office/drawing/2014/main" id="{1476A83C-1279-CA3C-9F14-5373875D01CC}"/>
+              </a:ext>
+            </a:extLst>
+          </p:cNvPr>
+          <p:cNvSpPr/>
+          <p:nvPr userDrawn="1"/>
+        </p:nvSpPr>
+        <p:spPr>
+          <a:xfrm>
+            <a:off x="0" y="901079"/>
+            <a:ext cx="12192000" cy="81416"/>
+          </a:xfrm>
+          <a:prstGeom prst="rect">
+            <a:avLst/>
+          </a:prstGeom>
+          <a:solidFill>
+            <a:srgbClr val="0369A1"/>
+          </a:solidFill>
+          <a:ln>
+            <a:noFill/>
+          </a:ln>
+        </p:spPr>
+        <p:style>
+          <a:lnRef idx="2">
+            <a:schemeClr val="accent1">
+              <a:shade val="15000"/>
+            </a:schemeClr>
+          </a:lnRef>
+          <a:fillRef idx="1">
+            <a:schemeClr val="accent1"/>
+          </a:fillRef>
+          <a:effectRef idx="0">
+            <a:schemeClr val="accent1"/>
+          </a:effectRef>
+          <a:fontRef idx="minor">
+            <a:schemeClr val="lt1"/>
+          </a:fontRef>
+        </p:style>
+        <p:txBody>
+          <a:bodyPr rtlCol="0" anchor="ctr"/>
+          <a:lstStyle/>
+          <a:p>
+            <a:pPr algn="ctr"/>
+            <a:endParaRPr lang="ko-KR" altLang="en-US"/>
+          </a:p>
+        </p:txBody>
+      </p:sp>
+      <p:sp>
+        <p:nvSpPr>
+          <p:cNvPr id="11" name="텍스트 개체 틀 2">
+            <a:extLst>
+              <a:ext uri="{FF2B5EF4-FFF2-40B4-BE49-F238E27FC236}">
+                <a16:creationId xmlns:a16="http://schemas.microsoft.com/office/drawing/2014/main" id="{92CF46FF-FF5D-754E-FF8F-73A07BDD2CA9}"/>
+              </a:ext>
+            </a:extLst>
+          </p:cNvPr>
+          <p:cNvSpPr>
+            <a:spLocks noGrp="1"/>
+          </p:cNvSpPr>
+          <p:nvPr>
+            <p:ph type="body" idx="1"/>
+          </p:nvPr>
+        </p:nvSpPr>
+        <p:spPr>
+          <a:xfrm>
+            <a:off x="400344" y="1080848"/>
+            <a:ext cx="11391309" cy="352188"/>
+          </a:xfrm>
+        </p:spPr>
+        <p:txBody>
+          <a:bodyPr>
+            <a:noAutofit/>
+          </a:bodyPr>
+          <a:lstStyle>
+            <a:lvl1pPr marL="0" indent="0">
+              <a:buNone/>
+              <a:defRPr sz="1800">
+                <a:solidFill>
+                  <a:schemeClr val="tx1">
+                    <a:tint val="82000"/>
+                  </a:schemeClr>
+                </a:solidFill>
+                <a:latin typeface="Pretendard SemiBold" panose="02000703000000020004" pitchFamily="50" charset="-127"/>
+                <a:ea typeface="Pretendard SemiBold" panose="02000703000000020004" pitchFamily="50" charset="-127"/>
+                <a:cs typeface="Pretendard SemiBold" panose="02000703000000020004" pitchFamily="50" charset="-127"/>
+              </a:defRPr>
+            </a:lvl1pPr>
+            <a:lvl2pPr marL="457200" indent="0">
+              <a:buNone/>
+              <a:defRPr sz="2000">
+                <a:solidFill>
+                  <a:schemeClr val="tx1">
+                    <a:tint val="82000"/>
+                  </a:schemeClr>
+                </a:solidFill>
+              </a:defRPr>
+            </a:lvl2pPr>
+            <a:lvl3pPr marL="914400" indent="0">
+              <a:buNone/>
+              <a:defRPr sz="1800">
+                <a:solidFill>
+                  <a:schemeClr val="tx1">
+                    <a:tint val="82000"/>
+                  </a:schemeClr>
+                </a:solidFill>
+              </a:defRPr>
+            </a:lvl3pPr>
+            <a:lvl4pPr marL="1371600" indent="0">
+              <a:buNone/>
+              <a:defRPr sz="1600">
+                <a:solidFill>
+                  <a:schemeClr val="tx1">
+                    <a:tint val="82000"/>
+                  </a:schemeClr>
+                </a:solidFill>
+              </a:defRPr>
+            </a:lvl4pPr>
+            <a:lvl5pPr marL="1828800" indent="0">
+              <a:buNone/>
+              <a:defRPr sz="1600">
+                <a:solidFill>
+                  <a:schemeClr val="tx1">
+                    <a:tint val="82000"/>
+                  </a:schemeClr>
+                </a:solidFill>
+              </a:defRPr>
+            </a:lvl5pPr>
+            <a:lvl6pPr marL="2286000" indent="0">
+              <a:buNone/>
+              <a:defRPr sz="1600">
+                <a:solidFill>
+                  <a:schemeClr val="tx1">
+                    <a:tint val="82000"/>
+                  </a:schemeClr>
+                </a:solidFill>
+              </a:defRPr>
+            </a:lvl6pPr>
+            <a:lvl7pPr marL="2743200" indent="0">
+              <a:buNone/>
+              <a:defRPr sz="1600">
+                <a:solidFill>
+                  <a:schemeClr val="tx1">
+                    <a:tint val="82000"/>
+                  </a:schemeClr>
+                </a:solidFill>
+              </a:defRPr>
+            </a:lvl7pPr>
+            <a:lvl8pPr marL="3200400" indent="0">
+              <a:buNone/>
+              <a:defRPr sz="1600">
+                <a:solidFill>
+                  <a:schemeClr val="tx1">
+                    <a:tint val="82000"/>
+                  </a:schemeClr>
+                </a:solidFill>
+              </a:defRPr>
+            </a:lvl8pPr>
+            <a:lvl9pPr marL="3657600" indent="0">
+              <a:buNone/>
+              <a:defRPr sz="1600">
+                <a:solidFill>
+                  <a:schemeClr val="tx1">
+                    <a:tint val="82000"/>
+                  </a:schemeClr>
+                </a:solidFill>
+              </a:defRPr>
+            </a:lvl9pPr>
+          </a:lstStyle>
           <a:p>
             <a:pPr lvl="0"/>
             <a:r>
-              <a:rPr lang="ko-KR" altLang="en-US"/>
+              <a:rPr lang="ko-KR" altLang="en-US" dirty="0"/>
               <a:t>마스터 텍스트 스타일을 편집하려면 클릭</a:t>
             </a:r>
-          </a:p>
-          <a:p>
-            <a:pPr lvl="1"/>
-            <a:r>
-              <a:rPr lang="ko-KR" altLang="en-US"/>
-              <a:t>두 번째 수준</a:t>
-            </a:r>
-          </a:p>
-          <a:p>
-            <a:pPr lvl="2"/>
-            <a:r>
-              <a:rPr lang="ko-KR" altLang="en-US"/>
-              <a:t>세 번째 수준</a:t>
-            </a:r>
-          </a:p>
-          <a:p>
-            <a:pPr lvl="3"/>
-            <a:r>
-              <a:rPr lang="ko-KR" altLang="en-US"/>
-              <a:t>네 번째 수준</a:t>
-            </a:r>
-          </a:p>
-          <a:p>
-            <a:pPr lvl="4"/>
-            <a:r>
-              <a:rPr lang="ko-KR" altLang="en-US"/>
-              <a:t>다섯 번째 수준</a:t>
-            </a:r>
-          </a:p>
-        </p:txBody>
-      </p:sp>
-      <p:sp>
-        <p:nvSpPr>
-          <p:cNvPr id="4" name="날짜 개체 틀 3">
-            <a:extLst>
-              <a:ext uri="{FF2B5EF4-FFF2-40B4-BE49-F238E27FC236}">
-                <a16:creationId xmlns:a16="http://schemas.microsoft.com/office/drawing/2014/main" id="{FCB0910D-FE26-4F95-88B3-ED135AA1A6D8}"/>
-              </a:ext>
-            </a:extLst>
-          </p:cNvPr>
-          <p:cNvSpPr>
-            <a:spLocks noGrp="1"/>
-          </p:cNvSpPr>
-          <p:nvPr>
-            <p:ph type="dt" sz="half" idx="10"/>
-          </p:nvPr>
-        </p:nvSpPr>
-        <p:spPr/>
-        <p:txBody>
-          <a:bodyPr/>
-          <a:lstStyle/>
-          <a:p>
-            <a:fld id="{722900D1-9152-4EFC-811C-A53380DDB436}" type="datetimeFigureOut">
-              <a:rPr lang="ko-KR" altLang="en-US" smtClean="0"/>
-              <a:t>2026-04-24</a:t>
-            </a:fld>
-            <a:endParaRPr lang="ko-KR" altLang="en-US"/>
-          </a:p>
-        </p:txBody>
-      </p:sp>
-      <p:sp>
-        <p:nvSpPr>
-          <p:cNvPr id="5" name="바닥글 개체 틀 4">
-            <a:extLst>
-              <a:ext uri="{FF2B5EF4-FFF2-40B4-BE49-F238E27FC236}">
-                <a16:creationId xmlns:a16="http://schemas.microsoft.com/office/drawing/2014/main" id="{CC6845CA-411D-024C-9F3D-7BDEAC6AB6B5}"/>
-              </a:ext>
-            </a:extLst>
-          </p:cNvPr>
-          <p:cNvSpPr>
-            <a:spLocks noGrp="1"/>
-          </p:cNvSpPr>
-          <p:nvPr>
-            <p:ph type="ftr" sz="quarter" idx="11"/>
-          </p:nvPr>
-        </p:nvSpPr>
-        <p:spPr/>
-        <p:txBody>
-          <a:bodyPr/>
-          <a:lstStyle/>
-          <a:p>
-            <a:endParaRPr lang="ko-KR" altLang="en-US"/>
-          </a:p>
-        </p:txBody>
-      </p:sp>
-      <p:sp>
-        <p:nvSpPr>
-          <p:cNvPr id="6" name="슬라이드 번호 개체 틀 5">
-            <a:extLst>
-              <a:ext uri="{FF2B5EF4-FFF2-40B4-BE49-F238E27FC236}">
-                <a16:creationId xmlns:a16="http://schemas.microsoft.com/office/drawing/2014/main" id="{0804E36C-579D-199B-8D37-FD39D09ADBE0}"/>
-              </a:ext>
-            </a:extLst>
-          </p:cNvPr>
-          <p:cNvSpPr>
-            <a:spLocks noGrp="1"/>
-          </p:cNvSpPr>
-          <p:nvPr>
-            <p:ph type="sldNum" sz="quarter" idx="12"/>
-          </p:nvPr>
-        </p:nvSpPr>
-        <p:spPr/>
-        <p:txBody>
-          <a:bodyPr/>
-          <a:lstStyle/>
-          <a:p>
-            <a:fld id="{D32CDD95-5991-4887-86B1-DDE1A52EC400}" type="slidenum">
-              <a:rPr lang="ko-KR" altLang="en-US" smtClean="0"/>
-              <a:t>‹#›</a:t>
-            </a:fld>
-            <a:endParaRPr lang="ko-KR" altLang="en-US"/>
           </a:p>
         </p:txBody>
       </p:sp>
@@ -1133,7 +1405,7 @@
           <a:p>
             <a:fld id="{722900D1-9152-4EFC-811C-A53380DDB436}" type="datetimeFigureOut">
               <a:rPr lang="ko-KR" altLang="en-US" smtClean="0"/>
-              <a:t>2026-04-24</a:t>
+              <a:t>2026-04-25</a:t>
             </a:fld>
             <a:endParaRPr lang="ko-KR" altLang="en-US"/>
           </a:p>
@@ -1398,7 +1670,7 @@
           <a:p>
             <a:fld id="{722900D1-9152-4EFC-811C-A53380DDB436}" type="datetimeFigureOut">
               <a:rPr lang="ko-KR" altLang="en-US" smtClean="0"/>
-              <a:t>2026-04-24</a:t>
+              <a:t>2026-04-25</a:t>
             </a:fld>
             <a:endParaRPr lang="ko-KR" altLang="en-US"/>
           </a:p>
@@ -1810,7 +2082,7 @@
           <a:p>
             <a:fld id="{722900D1-9152-4EFC-811C-A53380DDB436}" type="datetimeFigureOut">
               <a:rPr lang="ko-KR" altLang="en-US" smtClean="0"/>
-              <a:t>2026-04-24</a:t>
+              <a:t>2026-04-25</a:t>
             </a:fld>
             <a:endParaRPr lang="ko-KR" altLang="en-US"/>
           </a:p>
@@ -1951,7 +2223,7 @@
           <a:p>
             <a:fld id="{722900D1-9152-4EFC-811C-A53380DDB436}" type="datetimeFigureOut">
               <a:rPr lang="ko-KR" altLang="en-US" smtClean="0"/>
-              <a:t>2026-04-24</a:t>
+              <a:t>2026-04-25</a:t>
             </a:fld>
             <a:endParaRPr lang="ko-KR" altLang="en-US"/>
           </a:p>
@@ -2064,7 +2336,7 @@
           <a:p>
             <a:fld id="{722900D1-9152-4EFC-811C-A53380DDB436}" type="datetimeFigureOut">
               <a:rPr lang="ko-KR" altLang="en-US" smtClean="0"/>
-              <a:t>2026-04-24</a:t>
+              <a:t>2026-04-25</a:t>
             </a:fld>
             <a:endParaRPr lang="ko-KR" altLang="en-US"/>
           </a:p>
@@ -2375,7 +2647,7 @@
           <a:p>
             <a:fld id="{722900D1-9152-4EFC-811C-A53380DDB436}" type="datetimeFigureOut">
               <a:rPr lang="ko-KR" altLang="en-US" smtClean="0"/>
-              <a:t>2026-04-24</a:t>
+              <a:t>2026-04-25</a:t>
             </a:fld>
             <a:endParaRPr lang="ko-KR" altLang="en-US"/>
           </a:p>
@@ -2663,7 +2935,7 @@
           <a:p>
             <a:fld id="{722900D1-9152-4EFC-811C-A53380DDB436}" type="datetimeFigureOut">
               <a:rPr lang="ko-KR" altLang="en-US" smtClean="0"/>
-              <a:t>2026-04-24</a:t>
+              <a:t>2026-04-25</a:t>
             </a:fld>
             <a:endParaRPr lang="ko-KR" altLang="en-US"/>
           </a:p>
@@ -2904,7 +3176,7 @@
           <a:p>
             <a:fld id="{722900D1-9152-4EFC-811C-A53380DDB436}" type="datetimeFigureOut">
               <a:rPr lang="ko-KR" altLang="en-US" smtClean="0"/>
-              <a:t>2026-04-24</a:t>
+              <a:t>2026-04-25</a:t>
             </a:fld>
             <a:endParaRPr lang="ko-KR" altLang="en-US"/>
           </a:p>
@@ -3321,6 +3593,242 @@
           <a:chExt cx="0" cy="0"/>
         </a:xfrm>
       </p:grpSpPr>
+      <p:grpSp>
+        <p:nvGrpSpPr>
+          <p:cNvPr id="6" name="그룹 5">
+            <a:extLst>
+              <a:ext uri="{FF2B5EF4-FFF2-40B4-BE49-F238E27FC236}">
+                <a16:creationId xmlns:a16="http://schemas.microsoft.com/office/drawing/2014/main" id="{EF85AF16-11ED-F5E9-25DA-9A9A73376F26}"/>
+              </a:ext>
+            </a:extLst>
+          </p:cNvPr>
+          <p:cNvGrpSpPr/>
+          <p:nvPr/>
+        </p:nvGrpSpPr>
+        <p:grpSpPr>
+          <a:xfrm>
+            <a:off x="7862454" y="4862945"/>
+            <a:ext cx="2058494" cy="1184564"/>
+            <a:chOff x="755073" y="1995055"/>
+            <a:chExt cx="2058494" cy="1184564"/>
+          </a:xfrm>
+        </p:grpSpPr>
+        <p:pic>
+          <p:nvPicPr>
+            <p:cNvPr id="3" name="그림 2">
+              <a:extLst>
+                <a:ext uri="{FF2B5EF4-FFF2-40B4-BE49-F238E27FC236}">
+                  <a16:creationId xmlns:a16="http://schemas.microsoft.com/office/drawing/2014/main" id="{2F34AD17-4FB1-6A27-3562-97ED6D9B4917}"/>
+                </a:ext>
+              </a:extLst>
+            </p:cNvPr>
+            <p:cNvPicPr>
+              <a:picLocks noChangeAspect="1"/>
+            </p:cNvPicPr>
+            <p:nvPr/>
+          </p:nvPicPr>
+          <p:blipFill>
+            <a:blip r:embed="rId2">
+              <a:extLst>
+                <a:ext uri="{28A0092B-C50C-407E-A947-70E740481C1C}">
+                  <a14:useLocalDpi xmlns:a14="http://schemas.microsoft.com/office/drawing/2010/main" val="0"/>
+                </a:ext>
+              </a:extLst>
+            </a:blip>
+            <a:stretch>
+              <a:fillRect/>
+            </a:stretch>
+          </p:blipFill>
+          <p:spPr>
+            <a:xfrm>
+              <a:off x="755073" y="1995055"/>
+              <a:ext cx="1184564" cy="1184564"/>
+            </a:xfrm>
+            <a:prstGeom prst="rect">
+              <a:avLst/>
+            </a:prstGeom>
+          </p:spPr>
+        </p:pic>
+        <p:sp>
+          <p:nvSpPr>
+            <p:cNvPr id="5" name="TextBox 4">
+              <a:extLst>
+                <a:ext uri="{FF2B5EF4-FFF2-40B4-BE49-F238E27FC236}">
+                  <a16:creationId xmlns:a16="http://schemas.microsoft.com/office/drawing/2014/main" id="{9734EAAC-9854-1965-529A-8F5BD99066E6}"/>
+                </a:ext>
+              </a:extLst>
+            </p:cNvPr>
+            <p:cNvSpPr txBox="1"/>
+            <p:nvPr/>
+          </p:nvSpPr>
+          <p:spPr>
+            <a:xfrm>
+              <a:off x="2047010" y="2217610"/>
+              <a:ext cx="766557" cy="338554"/>
+            </a:xfrm>
+            <a:prstGeom prst="rect">
+              <a:avLst/>
+            </a:prstGeom>
+            <a:noFill/>
+          </p:spPr>
+          <p:txBody>
+            <a:bodyPr wrap="none" rtlCol="0">
+              <a:spAutoFit/>
+            </a:bodyPr>
+            <a:lstStyle/>
+            <a:p>
+              <a:r>
+                <a:rPr lang="ko-KR" altLang="en-US" sz="1600" dirty="0" err="1">
+                  <a:solidFill>
+                    <a:schemeClr val="tx1">
+                      <a:lumMod val="95000"/>
+                      <a:lumOff val="5000"/>
+                    </a:schemeClr>
+                  </a:solidFill>
+                  <a:latin typeface="Pretendard SemiBold" panose="02000703000000020004" pitchFamily="50" charset="-127"/>
+                  <a:ea typeface="Pretendard SemiBold" panose="02000703000000020004" pitchFamily="50" charset="-127"/>
+                  <a:cs typeface="Pretendard SemiBold" panose="02000703000000020004" pitchFamily="50" charset="-127"/>
+                </a:rPr>
+                <a:t>머꼬</a:t>
+              </a:r>
+              <a:r>
+                <a:rPr lang="ko-KR" altLang="en-US" sz="1600" dirty="0">
+                  <a:solidFill>
+                    <a:schemeClr val="tx1">
+                      <a:lumMod val="95000"/>
+                      <a:lumOff val="5000"/>
+                    </a:schemeClr>
+                  </a:solidFill>
+                  <a:latin typeface="Pretendard SemiBold" panose="02000703000000020004" pitchFamily="50" charset="-127"/>
+                  <a:ea typeface="Pretendard SemiBold" panose="02000703000000020004" pitchFamily="50" charset="-127"/>
+                  <a:cs typeface="Pretendard SemiBold" panose="02000703000000020004" pitchFamily="50" charset="-127"/>
+                </a:rPr>
+                <a:t> 팀</a:t>
+              </a:r>
+            </a:p>
+          </p:txBody>
+        </p:sp>
+      </p:grpSp>
+      <p:sp>
+        <p:nvSpPr>
+          <p:cNvPr id="9" name="직사각형 8">
+            <a:extLst>
+              <a:ext uri="{FF2B5EF4-FFF2-40B4-BE49-F238E27FC236}">
+                <a16:creationId xmlns:a16="http://schemas.microsoft.com/office/drawing/2014/main" id="{C44EA23E-1934-DCB1-E0D1-E662008EF136}"/>
+              </a:ext>
+            </a:extLst>
+          </p:cNvPr>
+          <p:cNvSpPr/>
+          <p:nvPr/>
+        </p:nvSpPr>
+        <p:spPr>
+          <a:xfrm>
+            <a:off x="0" y="6213764"/>
+            <a:ext cx="12192000" cy="644236"/>
+          </a:xfrm>
+          <a:prstGeom prst="rect">
+            <a:avLst/>
+          </a:prstGeom>
+          <a:solidFill>
+            <a:srgbClr val="0369A1"/>
+          </a:solidFill>
+          <a:ln>
+            <a:noFill/>
+          </a:ln>
+        </p:spPr>
+        <p:style>
+          <a:lnRef idx="2">
+            <a:schemeClr val="accent1">
+              <a:shade val="15000"/>
+            </a:schemeClr>
+          </a:lnRef>
+          <a:fillRef idx="1">
+            <a:schemeClr val="accent1"/>
+          </a:fillRef>
+          <a:effectRef idx="0">
+            <a:schemeClr val="accent1"/>
+          </a:effectRef>
+          <a:fontRef idx="minor">
+            <a:schemeClr val="lt1"/>
+          </a:fontRef>
+        </p:style>
+        <p:txBody>
+          <a:bodyPr rtlCol="0" anchor="ctr"/>
+          <a:lstStyle/>
+          <a:p>
+            <a:pPr algn="ctr"/>
+            <a:endParaRPr lang="ko-KR" altLang="en-US"/>
+          </a:p>
+        </p:txBody>
+      </p:sp>
+      <p:sp>
+        <p:nvSpPr>
+          <p:cNvPr id="12" name="TextBox 11">
+            <a:extLst>
+              <a:ext uri="{FF2B5EF4-FFF2-40B4-BE49-F238E27FC236}">
+                <a16:creationId xmlns:a16="http://schemas.microsoft.com/office/drawing/2014/main" id="{3213435D-912C-C8FB-389C-8DCE8A9187DF}"/>
+              </a:ext>
+            </a:extLst>
+          </p:cNvPr>
+          <p:cNvSpPr txBox="1"/>
+          <p:nvPr/>
+        </p:nvSpPr>
+        <p:spPr>
+          <a:xfrm>
+            <a:off x="9154391" y="5267143"/>
+            <a:ext cx="1770036" cy="646331"/>
+          </a:xfrm>
+          <a:prstGeom prst="rect">
+            <a:avLst/>
+          </a:prstGeom>
+          <a:noFill/>
+        </p:spPr>
+        <p:txBody>
+          <a:bodyPr wrap="none" rtlCol="0">
+            <a:spAutoFit/>
+          </a:bodyPr>
+          <a:lstStyle/>
+          <a:p>
+            <a:r>
+              <a:rPr lang="en-US" altLang="ko-KR" sz="3600" dirty="0">
+                <a:gradFill flip="none" rotWithShape="1">
+                  <a:gsLst>
+                    <a:gs pos="0">
+                      <a:srgbClr val="0369A1"/>
+                    </a:gs>
+                    <a:gs pos="100000">
+                      <a:srgbClr val="00B0F0"/>
+                    </a:gs>
+                  </a:gsLst>
+                  <a:lin ang="0" scaled="1"/>
+                  <a:tileRect/>
+                </a:gradFill>
+                <a:latin typeface="Pretendard SemiBold" panose="02000703000000020004" pitchFamily="50" charset="-127"/>
+                <a:ea typeface="Pretendard SemiBold" panose="02000703000000020004" pitchFamily="50" charset="-127"/>
+                <a:cs typeface="Pretendard SemiBold" panose="02000703000000020004" pitchFamily="50" charset="-127"/>
+              </a:rPr>
+              <a:t>Polar.ai</a:t>
+            </a:r>
+            <a:endParaRPr lang="ko-KR" altLang="en-US" sz="3600" dirty="0">
+              <a:gradFill flip="none" rotWithShape="1">
+                <a:gsLst>
+                  <a:gs pos="0">
+                    <a:srgbClr val="0369A1"/>
+                  </a:gs>
+                  <a:gs pos="100000">
+                    <a:srgbClr val="00B0F0"/>
+                  </a:gs>
+                </a:gsLst>
+                <a:lin ang="0" scaled="1"/>
+                <a:tileRect/>
+              </a:gradFill>
+              <a:latin typeface="Pretendard SemiBold" panose="02000703000000020004" pitchFamily="50" charset="-127"/>
+              <a:ea typeface="Pretendard SemiBold" panose="02000703000000020004" pitchFamily="50" charset="-127"/>
+              <a:cs typeface="Pretendard SemiBold" panose="02000703000000020004" pitchFamily="50" charset="-127"/>
+            </a:endParaRPr>
+          </a:p>
+        </p:txBody>
+      </p:sp>
     </p:spTree>
     <p:extLst>
       <p:ext uri="{BB962C8B-B14F-4D97-AF65-F5344CB8AC3E}">
@@ -3334,7 +3842,1766 @@
 </p:sld>
 </file>
 
+<file path=ppt/slides/slide2.xml><?xml version="1.0" encoding="utf-8"?>
+<p:sld xmlns:a="http://schemas.openxmlformats.org/drawingml/2006/main" xmlns:r="http://schemas.openxmlformats.org/officeDocument/2006/relationships" xmlns:p="http://schemas.openxmlformats.org/presentationml/2006/main">
+  <p:cSld>
+    <p:spTree>
+      <p:nvGrpSpPr>
+        <p:cNvPr id="1" name=""/>
+        <p:cNvGrpSpPr/>
+        <p:nvPr/>
+      </p:nvGrpSpPr>
+      <p:grpSpPr>
+        <a:xfrm>
+          <a:off x="0" y="0"/>
+          <a:ext cx="0" cy="0"/>
+          <a:chOff x="0" y="0"/>
+          <a:chExt cx="0" cy="0"/>
+        </a:xfrm>
+      </p:grpSpPr>
+      <p:sp>
+        <p:nvSpPr>
+          <p:cNvPr id="2" name="제목 1">
+            <a:extLst>
+              <a:ext uri="{FF2B5EF4-FFF2-40B4-BE49-F238E27FC236}">
+                <a16:creationId xmlns:a16="http://schemas.microsoft.com/office/drawing/2014/main" id="{BD86CD14-DF95-0DE9-0B34-F0BFD415341D}"/>
+              </a:ext>
+            </a:extLst>
+          </p:cNvPr>
+          <p:cNvSpPr>
+            <a:spLocks noGrp="1"/>
+          </p:cNvSpPr>
+          <p:nvPr>
+            <p:ph type="title"/>
+          </p:nvPr>
+        </p:nvSpPr>
+        <p:spPr/>
+        <p:txBody>
+          <a:bodyPr/>
+          <a:lstStyle/>
+          <a:p>
+            <a:r>
+              <a:rPr lang="ko-KR" altLang="en-US" dirty="0"/>
+              <a:t>문제 인식</a:t>
+            </a:r>
+          </a:p>
+        </p:txBody>
+      </p:sp>
+      <p:pic>
+        <p:nvPicPr>
+          <p:cNvPr id="1026" name="Picture 2">
+            <a:extLst>
+              <a:ext uri="{FF2B5EF4-FFF2-40B4-BE49-F238E27FC236}">
+                <a16:creationId xmlns:a16="http://schemas.microsoft.com/office/drawing/2014/main" id="{99322068-7ED7-687C-AF25-9816038BAE27}"/>
+              </a:ext>
+            </a:extLst>
+          </p:cNvPr>
+          <p:cNvPicPr>
+            <a:picLocks noChangeAspect="1" noChangeArrowheads="1"/>
+          </p:cNvPicPr>
+          <p:nvPr/>
+        </p:nvPicPr>
+        <p:blipFill>
+          <a:blip r:embed="rId2">
+            <a:extLst>
+              <a:ext uri="{28A0092B-C50C-407E-A947-70E740481C1C}">
+                <a14:useLocalDpi xmlns:a14="http://schemas.microsoft.com/office/drawing/2010/main" val="0"/>
+              </a:ext>
+            </a:extLst>
+          </a:blip>
+          <a:srcRect/>
+          <a:stretch>
+            <a:fillRect/>
+          </a:stretch>
+        </p:blipFill>
+        <p:spPr bwMode="auto">
+          <a:xfrm>
+            <a:off x="3900051" y="1065858"/>
+            <a:ext cx="4391894" cy="4476900"/>
+          </a:xfrm>
+          <a:prstGeom prst="rect">
+            <a:avLst/>
+          </a:prstGeom>
+          <a:noFill/>
+          <a:extLst>
+            <a:ext uri="{909E8E84-426E-40DD-AFC4-6F175D3DCCD1}">
+              <a14:hiddenFill xmlns:a14="http://schemas.microsoft.com/office/drawing/2010/main">
+                <a:solidFill>
+                  <a:srgbClr val="FFFFFF"/>
+                </a:solidFill>
+              </a14:hiddenFill>
+            </a:ext>
+          </a:extLst>
+        </p:spPr>
+      </p:pic>
+      <p:sp>
+        <p:nvSpPr>
+          <p:cNvPr id="3" name="텍스트 개체 틀 2">
+            <a:extLst>
+              <a:ext uri="{FF2B5EF4-FFF2-40B4-BE49-F238E27FC236}">
+                <a16:creationId xmlns:a16="http://schemas.microsoft.com/office/drawing/2014/main" id="{A5372817-67B1-84ED-D896-6A9182900B95}"/>
+              </a:ext>
+            </a:extLst>
+          </p:cNvPr>
+          <p:cNvSpPr>
+            <a:spLocks noGrp="1"/>
+          </p:cNvSpPr>
+          <p:nvPr>
+            <p:ph type="body" idx="1"/>
+          </p:nvPr>
+        </p:nvSpPr>
+        <p:spPr>
+          <a:xfrm>
+            <a:off x="400345" y="5792142"/>
+            <a:ext cx="11391309" cy="352188"/>
+          </a:xfrm>
+        </p:spPr>
+        <p:txBody>
+          <a:bodyPr/>
+          <a:lstStyle/>
+          <a:p>
+            <a:r>
+              <a:rPr lang="ko-KR" altLang="en-US" dirty="0" err="1"/>
+              <a:t>ㅇㄹ</a:t>
+            </a:r>
+            <a:endParaRPr lang="ko-KR" altLang="en-US" dirty="0"/>
+          </a:p>
+        </p:txBody>
+      </p:sp>
+      <p:sp>
+        <p:nvSpPr>
+          <p:cNvPr id="5" name="TextBox 4">
+            <a:extLst>
+              <a:ext uri="{FF2B5EF4-FFF2-40B4-BE49-F238E27FC236}">
+                <a16:creationId xmlns:a16="http://schemas.microsoft.com/office/drawing/2014/main" id="{A251AD0B-E60F-3A03-D8AD-9F8467E2FC4D}"/>
+              </a:ext>
+            </a:extLst>
+          </p:cNvPr>
+          <p:cNvSpPr txBox="1"/>
+          <p:nvPr/>
+        </p:nvSpPr>
+        <p:spPr>
+          <a:xfrm>
+            <a:off x="3048864" y="5422467"/>
+            <a:ext cx="6094268" cy="261610"/>
+          </a:xfrm>
+          <a:prstGeom prst="rect">
+            <a:avLst/>
+          </a:prstGeom>
+          <a:noFill/>
+        </p:spPr>
+        <p:txBody>
+          <a:bodyPr wrap="square">
+            <a:spAutoFit/>
+          </a:bodyPr>
+          <a:lstStyle/>
+          <a:p>
+            <a:pPr algn="ctr"/>
+            <a:r>
+              <a:rPr lang="en-US" altLang="ko-KR" sz="1100" i="1" dirty="0">
+                <a:solidFill>
+                  <a:schemeClr val="tx1">
+                    <a:lumMod val="50000"/>
+                    <a:lumOff val="50000"/>
+                  </a:schemeClr>
+                </a:solidFill>
+                <a:latin typeface="Pretendard Medium" panose="02000603000000020004" pitchFamily="50" charset="-127"/>
+                <a:ea typeface="Pretendard Medium" panose="02000603000000020004" pitchFamily="50" charset="-127"/>
+                <a:cs typeface="Pretendard Medium" panose="02000603000000020004" pitchFamily="50" charset="-127"/>
+              </a:rPr>
+              <a:t>&lt;</a:t>
+            </a:r>
+            <a:r>
+              <a:rPr lang="ko-KR" altLang="en-US" sz="1100" i="1" dirty="0">
+                <a:solidFill>
+                  <a:schemeClr val="tx1">
+                    <a:lumMod val="50000"/>
+                    <a:lumOff val="50000"/>
+                  </a:schemeClr>
+                </a:solidFill>
+                <a:latin typeface="Pretendard Medium" panose="02000603000000020004" pitchFamily="50" charset="-127"/>
+                <a:ea typeface="Pretendard Medium" panose="02000603000000020004" pitchFamily="50" charset="-127"/>
+                <a:cs typeface="Pretendard Medium" panose="02000603000000020004" pitchFamily="50" charset="-127"/>
+              </a:rPr>
+              <a:t>세상이 아직 따뜻하다는 증거</a:t>
+            </a:r>
+            <a:r>
+              <a:rPr lang="en-US" altLang="ko-KR" sz="1100" i="1" dirty="0">
+                <a:solidFill>
+                  <a:schemeClr val="tx1">
+                    <a:lumMod val="50000"/>
+                    <a:lumOff val="50000"/>
+                  </a:schemeClr>
+                </a:solidFill>
+                <a:latin typeface="Pretendard Medium" panose="02000603000000020004" pitchFamily="50" charset="-127"/>
+                <a:ea typeface="Pretendard Medium" panose="02000603000000020004" pitchFamily="50" charset="-127"/>
+                <a:cs typeface="Pretendard Medium" panose="02000603000000020004" pitchFamily="50" charset="-127"/>
+              </a:rPr>
+              <a:t>&gt;</a:t>
+            </a:r>
+            <a:endParaRPr lang="ko-KR" altLang="en-US" sz="1100" i="1" dirty="0">
+              <a:solidFill>
+                <a:schemeClr val="tx1">
+                  <a:lumMod val="50000"/>
+                  <a:lumOff val="50000"/>
+                </a:schemeClr>
+              </a:solidFill>
+              <a:latin typeface="Pretendard Medium" panose="02000603000000020004" pitchFamily="50" charset="-127"/>
+              <a:ea typeface="Pretendard Medium" panose="02000603000000020004" pitchFamily="50" charset="-127"/>
+              <a:cs typeface="Pretendard Medium" panose="02000603000000020004" pitchFamily="50" charset="-127"/>
+            </a:endParaRPr>
+          </a:p>
+        </p:txBody>
+      </p:sp>
+    </p:spTree>
+    <p:extLst>
+      <p:ext uri="{BB962C8B-B14F-4D97-AF65-F5344CB8AC3E}">
+        <p14:creationId xmlns:p14="http://schemas.microsoft.com/office/powerpoint/2010/main" val="796112192"/>
+      </p:ext>
+    </p:extLst>
+  </p:cSld>
+  <p:clrMapOvr>
+    <a:masterClrMapping/>
+  </p:clrMapOvr>
+</p:sld>
+</file>
+
+<file path=ppt/slides/slide3.xml><?xml version="1.0" encoding="utf-8"?>
+<p:sld xmlns:a="http://schemas.openxmlformats.org/drawingml/2006/main" xmlns:r="http://schemas.openxmlformats.org/officeDocument/2006/relationships" xmlns:p="http://schemas.openxmlformats.org/presentationml/2006/main">
+  <p:cSld>
+    <p:spTree>
+      <p:nvGrpSpPr>
+        <p:cNvPr id="1" name="">
+          <a:extLst>
+            <a:ext uri="{FF2B5EF4-FFF2-40B4-BE49-F238E27FC236}">
+              <a16:creationId xmlns:a16="http://schemas.microsoft.com/office/drawing/2014/main" id="{6AB0623F-58E4-B6A6-C676-193898F329AE}"/>
+            </a:ext>
+          </a:extLst>
+        </p:cNvPr>
+        <p:cNvGrpSpPr/>
+        <p:nvPr/>
+      </p:nvGrpSpPr>
+      <p:grpSpPr>
+        <a:xfrm>
+          <a:off x="0" y="0"/>
+          <a:ext cx="0" cy="0"/>
+          <a:chOff x="0" y="0"/>
+          <a:chExt cx="0" cy="0"/>
+        </a:xfrm>
+      </p:grpSpPr>
+      <p:sp>
+        <p:nvSpPr>
+          <p:cNvPr id="2" name="제목 1">
+            <a:extLst>
+              <a:ext uri="{FF2B5EF4-FFF2-40B4-BE49-F238E27FC236}">
+                <a16:creationId xmlns:a16="http://schemas.microsoft.com/office/drawing/2014/main" id="{55968E30-6AF7-4373-2F10-61C80F50F70B}"/>
+              </a:ext>
+            </a:extLst>
+          </p:cNvPr>
+          <p:cNvSpPr>
+            <a:spLocks noGrp="1"/>
+          </p:cNvSpPr>
+          <p:nvPr>
+            <p:ph type="title"/>
+          </p:nvPr>
+        </p:nvSpPr>
+        <p:spPr/>
+        <p:txBody>
+          <a:bodyPr/>
+          <a:lstStyle/>
+          <a:p>
+            <a:r>
+              <a:rPr lang="ko-KR" altLang="en-US" dirty="0"/>
+              <a:t>기능 소개</a:t>
+            </a:r>
+          </a:p>
+        </p:txBody>
+      </p:sp>
+      <p:sp>
+        <p:nvSpPr>
+          <p:cNvPr id="3" name="텍스트 개체 틀 2">
+            <a:extLst>
+              <a:ext uri="{FF2B5EF4-FFF2-40B4-BE49-F238E27FC236}">
+                <a16:creationId xmlns:a16="http://schemas.microsoft.com/office/drawing/2014/main" id="{C76CA6EF-7839-5183-49DE-E50657599F07}"/>
+              </a:ext>
+            </a:extLst>
+          </p:cNvPr>
+          <p:cNvSpPr>
+            <a:spLocks noGrp="1"/>
+          </p:cNvSpPr>
+          <p:nvPr>
+            <p:ph type="body" idx="1"/>
+          </p:nvPr>
+        </p:nvSpPr>
+        <p:spPr>
+          <a:xfrm>
+            <a:off x="400344" y="6153666"/>
+            <a:ext cx="11391309" cy="352188"/>
+          </a:xfrm>
+        </p:spPr>
+        <p:txBody>
+          <a:bodyPr/>
+          <a:lstStyle/>
+          <a:p>
+            <a:pPr algn="ctr"/>
+            <a:r>
+              <a:rPr lang="ko-KR" altLang="en-US" dirty="0"/>
+              <a:t>홈페이지</a:t>
+            </a:r>
+          </a:p>
+        </p:txBody>
+      </p:sp>
+      <p:pic>
+        <p:nvPicPr>
+          <p:cNvPr id="5" name="그림 4">
+            <a:extLst>
+              <a:ext uri="{FF2B5EF4-FFF2-40B4-BE49-F238E27FC236}">
+                <a16:creationId xmlns:a16="http://schemas.microsoft.com/office/drawing/2014/main" id="{B1D742EF-C2FD-6B55-EF5B-7246F7B419E4}"/>
+              </a:ext>
+            </a:extLst>
+          </p:cNvPr>
+          <p:cNvPicPr>
+            <a:picLocks noChangeAspect="1"/>
+          </p:cNvPicPr>
+          <p:nvPr/>
+        </p:nvPicPr>
+        <p:blipFill>
+          <a:blip r:embed="rId2"/>
+          <a:srcRect t="13090" r="3221"/>
+          <a:stretch>
+            <a:fillRect/>
+          </a:stretch>
+        </p:blipFill>
+        <p:spPr>
+          <a:xfrm>
+            <a:off x="1062851" y="1261364"/>
+            <a:ext cx="10066294" cy="4802358"/>
+          </a:xfrm>
+          <a:prstGeom prst="rect">
+            <a:avLst/>
+          </a:prstGeom>
+        </p:spPr>
+      </p:pic>
+    </p:spTree>
+    <p:extLst>
+      <p:ext uri="{BB962C8B-B14F-4D97-AF65-F5344CB8AC3E}">
+        <p14:creationId xmlns:p14="http://schemas.microsoft.com/office/powerpoint/2010/main" val="1576034334"/>
+      </p:ext>
+    </p:extLst>
+  </p:cSld>
+  <p:clrMapOvr>
+    <a:masterClrMapping/>
+  </p:clrMapOvr>
+</p:sld>
+</file>
+
+<file path=ppt/slides/slide4.xml><?xml version="1.0" encoding="utf-8"?>
+<p:sld xmlns:a="http://schemas.openxmlformats.org/drawingml/2006/main" xmlns:r="http://schemas.openxmlformats.org/officeDocument/2006/relationships" xmlns:p="http://schemas.openxmlformats.org/presentationml/2006/main">
+  <p:cSld>
+    <p:spTree>
+      <p:nvGrpSpPr>
+        <p:cNvPr id="1" name="">
+          <a:extLst>
+            <a:ext uri="{FF2B5EF4-FFF2-40B4-BE49-F238E27FC236}">
+              <a16:creationId xmlns:a16="http://schemas.microsoft.com/office/drawing/2014/main" id="{82F1754D-086D-7E4B-EDD2-9889369D6283}"/>
+            </a:ext>
+          </a:extLst>
+        </p:cNvPr>
+        <p:cNvGrpSpPr/>
+        <p:nvPr/>
+      </p:nvGrpSpPr>
+      <p:grpSpPr>
+        <a:xfrm>
+          <a:off x="0" y="0"/>
+          <a:ext cx="0" cy="0"/>
+          <a:chOff x="0" y="0"/>
+          <a:chExt cx="0" cy="0"/>
+        </a:xfrm>
+      </p:grpSpPr>
+      <p:sp>
+        <p:nvSpPr>
+          <p:cNvPr id="2" name="제목 1">
+            <a:extLst>
+              <a:ext uri="{FF2B5EF4-FFF2-40B4-BE49-F238E27FC236}">
+                <a16:creationId xmlns:a16="http://schemas.microsoft.com/office/drawing/2014/main" id="{BDCB2BC6-D3A7-6332-6337-EEF85677A466}"/>
+              </a:ext>
+            </a:extLst>
+          </p:cNvPr>
+          <p:cNvSpPr>
+            <a:spLocks noGrp="1"/>
+          </p:cNvSpPr>
+          <p:nvPr>
+            <p:ph type="title"/>
+          </p:nvPr>
+        </p:nvSpPr>
+        <p:spPr/>
+        <p:txBody>
+          <a:bodyPr/>
+          <a:lstStyle/>
+          <a:p>
+            <a:r>
+              <a:rPr lang="ko-KR" altLang="en-US" dirty="0"/>
+              <a:t>기능 소개</a:t>
+            </a:r>
+          </a:p>
+        </p:txBody>
+      </p:sp>
+      <p:sp>
+        <p:nvSpPr>
+          <p:cNvPr id="3" name="텍스트 개체 틀 2">
+            <a:extLst>
+              <a:ext uri="{FF2B5EF4-FFF2-40B4-BE49-F238E27FC236}">
+                <a16:creationId xmlns:a16="http://schemas.microsoft.com/office/drawing/2014/main" id="{B381B016-A59C-06BC-A800-C133A84DF8DF}"/>
+              </a:ext>
+            </a:extLst>
+          </p:cNvPr>
+          <p:cNvSpPr>
+            <a:spLocks noGrp="1"/>
+          </p:cNvSpPr>
+          <p:nvPr>
+            <p:ph type="body" idx="1"/>
+          </p:nvPr>
+        </p:nvSpPr>
+        <p:spPr>
+          <a:xfrm>
+            <a:off x="400344" y="6153666"/>
+            <a:ext cx="11391309" cy="352188"/>
+          </a:xfrm>
+        </p:spPr>
+        <p:txBody>
+          <a:bodyPr/>
+          <a:lstStyle/>
+          <a:p>
+            <a:pPr algn="ctr"/>
+            <a:r>
+              <a:rPr lang="ko-KR" altLang="en-US" dirty="0"/>
+              <a:t>빠른 질문과 모델 선택</a:t>
+            </a:r>
+          </a:p>
+        </p:txBody>
+      </p:sp>
+      <p:pic>
+        <p:nvPicPr>
+          <p:cNvPr id="8" name="그림 7">
+            <a:extLst>
+              <a:ext uri="{FF2B5EF4-FFF2-40B4-BE49-F238E27FC236}">
+                <a16:creationId xmlns:a16="http://schemas.microsoft.com/office/drawing/2014/main" id="{39E7B3AD-CAD5-E3E0-3442-985D3D448147}"/>
+              </a:ext>
+            </a:extLst>
+          </p:cNvPr>
+          <p:cNvPicPr>
+            <a:picLocks noChangeAspect="1"/>
+          </p:cNvPicPr>
+          <p:nvPr/>
+        </p:nvPicPr>
+        <p:blipFill>
+          <a:blip r:embed="rId2"/>
+          <a:srcRect l="29962" t="50000" r="21146" b="2953"/>
+          <a:stretch>
+            <a:fillRect/>
+          </a:stretch>
+        </p:blipFill>
+        <p:spPr>
+          <a:xfrm>
+            <a:off x="2335551" y="2192483"/>
+            <a:ext cx="7520894" cy="3844636"/>
+          </a:xfrm>
+          <a:prstGeom prst="rect">
+            <a:avLst/>
+          </a:prstGeom>
+        </p:spPr>
+      </p:pic>
+      <p:sp>
+        <p:nvSpPr>
+          <p:cNvPr id="9" name="타원 8">
+            <a:extLst>
+              <a:ext uri="{FF2B5EF4-FFF2-40B4-BE49-F238E27FC236}">
+                <a16:creationId xmlns:a16="http://schemas.microsoft.com/office/drawing/2014/main" id="{4B46C2B8-401D-14F6-C71A-290EAEE6ECEC}"/>
+              </a:ext>
+            </a:extLst>
+          </p:cNvPr>
+          <p:cNvSpPr/>
+          <p:nvPr/>
+        </p:nvSpPr>
+        <p:spPr>
+          <a:xfrm>
+            <a:off x="2408348" y="4378555"/>
+            <a:ext cx="1758407" cy="1658564"/>
+          </a:xfrm>
+          <a:prstGeom prst="ellipse">
+            <a:avLst/>
+          </a:prstGeom>
+          <a:noFill/>
+          <a:ln w="76200">
+            <a:solidFill>
+              <a:srgbClr val="FF0000">
+                <a:alpha val="25000"/>
+              </a:srgbClr>
+            </a:solidFill>
+          </a:ln>
+        </p:spPr>
+        <p:style>
+          <a:lnRef idx="2">
+            <a:schemeClr val="accent1">
+              <a:shade val="15000"/>
+            </a:schemeClr>
+          </a:lnRef>
+          <a:fillRef idx="1">
+            <a:schemeClr val="accent1"/>
+          </a:fillRef>
+          <a:effectRef idx="0">
+            <a:schemeClr val="accent1"/>
+          </a:effectRef>
+          <a:fontRef idx="minor">
+            <a:schemeClr val="lt1"/>
+          </a:fontRef>
+        </p:style>
+        <p:txBody>
+          <a:bodyPr rtlCol="0" anchor="ctr"/>
+          <a:lstStyle/>
+          <a:p>
+            <a:pPr algn="ctr"/>
+            <a:endParaRPr lang="ko-KR" altLang="en-US"/>
+          </a:p>
+        </p:txBody>
+      </p:sp>
+      <p:sp>
+        <p:nvSpPr>
+          <p:cNvPr id="10" name="타원 9">
+            <a:extLst>
+              <a:ext uri="{FF2B5EF4-FFF2-40B4-BE49-F238E27FC236}">
+                <a16:creationId xmlns:a16="http://schemas.microsoft.com/office/drawing/2014/main" id="{101B4EB8-67FF-3F5B-4808-E0C1A3AB0525}"/>
+              </a:ext>
+            </a:extLst>
+          </p:cNvPr>
+          <p:cNvSpPr/>
+          <p:nvPr/>
+        </p:nvSpPr>
+        <p:spPr>
+          <a:xfrm>
+            <a:off x="4039721" y="2680256"/>
+            <a:ext cx="427800" cy="403509"/>
+          </a:xfrm>
+          <a:prstGeom prst="ellipse">
+            <a:avLst/>
+          </a:prstGeom>
+          <a:noFill/>
+          <a:ln w="76200">
+            <a:solidFill>
+              <a:srgbClr val="FF0000">
+                <a:alpha val="25000"/>
+              </a:srgbClr>
+            </a:solidFill>
+          </a:ln>
+        </p:spPr>
+        <p:style>
+          <a:lnRef idx="2">
+            <a:schemeClr val="accent1">
+              <a:shade val="15000"/>
+            </a:schemeClr>
+          </a:lnRef>
+          <a:fillRef idx="1">
+            <a:schemeClr val="accent1"/>
+          </a:fillRef>
+          <a:effectRef idx="0">
+            <a:schemeClr val="accent1"/>
+          </a:effectRef>
+          <a:fontRef idx="minor">
+            <a:schemeClr val="lt1"/>
+          </a:fontRef>
+        </p:style>
+        <p:txBody>
+          <a:bodyPr rtlCol="0" anchor="ctr"/>
+          <a:lstStyle/>
+          <a:p>
+            <a:pPr algn="ctr"/>
+            <a:endParaRPr lang="ko-KR" altLang="en-US"/>
+          </a:p>
+        </p:txBody>
+      </p:sp>
+    </p:spTree>
+    <p:extLst>
+      <p:ext uri="{BB962C8B-B14F-4D97-AF65-F5344CB8AC3E}">
+        <p14:creationId xmlns:p14="http://schemas.microsoft.com/office/powerpoint/2010/main" val="491524262"/>
+      </p:ext>
+    </p:extLst>
+  </p:cSld>
+  <p:clrMapOvr>
+    <a:masterClrMapping/>
+  </p:clrMapOvr>
+</p:sld>
+</file>
+
+<file path=ppt/slides/slide5.xml><?xml version="1.0" encoding="utf-8"?>
+<p:sld xmlns:a="http://schemas.openxmlformats.org/drawingml/2006/main" xmlns:r="http://schemas.openxmlformats.org/officeDocument/2006/relationships" xmlns:p="http://schemas.openxmlformats.org/presentationml/2006/main">
+  <p:cSld>
+    <p:spTree>
+      <p:nvGrpSpPr>
+        <p:cNvPr id="1" name=""/>
+        <p:cNvGrpSpPr/>
+        <p:nvPr/>
+      </p:nvGrpSpPr>
+      <p:grpSpPr>
+        <a:xfrm>
+          <a:off x="0" y="0"/>
+          <a:ext cx="0" cy="0"/>
+          <a:chOff x="0" y="0"/>
+          <a:chExt cx="0" cy="0"/>
+        </a:xfrm>
+      </p:grpSpPr>
+      <p:sp>
+        <p:nvSpPr>
+          <p:cNvPr id="2" name="제목 1">
+            <a:extLst>
+              <a:ext uri="{FF2B5EF4-FFF2-40B4-BE49-F238E27FC236}">
+                <a16:creationId xmlns:a16="http://schemas.microsoft.com/office/drawing/2014/main" id="{BAC4927B-ED28-994B-B034-04C8D7694C98}"/>
+              </a:ext>
+            </a:extLst>
+          </p:cNvPr>
+          <p:cNvSpPr>
+            <a:spLocks noGrp="1"/>
+          </p:cNvSpPr>
+          <p:nvPr>
+            <p:ph type="title"/>
+          </p:nvPr>
+        </p:nvSpPr>
+        <p:spPr/>
+        <p:txBody>
+          <a:bodyPr/>
+          <a:lstStyle/>
+          <a:p>
+            <a:r>
+              <a:rPr lang="ko-KR" altLang="en-US" dirty="0"/>
+              <a:t>기능 소개</a:t>
+            </a:r>
+          </a:p>
+        </p:txBody>
+      </p:sp>
+      <p:sp>
+        <p:nvSpPr>
+          <p:cNvPr id="3" name="텍스트 개체 틀 2">
+            <a:extLst>
+              <a:ext uri="{FF2B5EF4-FFF2-40B4-BE49-F238E27FC236}">
+                <a16:creationId xmlns:a16="http://schemas.microsoft.com/office/drawing/2014/main" id="{FE6894B0-242C-6BF1-E112-4864BA13C3B0}"/>
+              </a:ext>
+            </a:extLst>
+          </p:cNvPr>
+          <p:cNvSpPr>
+            <a:spLocks noGrp="1"/>
+          </p:cNvSpPr>
+          <p:nvPr>
+            <p:ph type="body" idx="1"/>
+          </p:nvPr>
+        </p:nvSpPr>
+        <p:spPr>
+          <a:xfrm>
+            <a:off x="400344" y="6153666"/>
+            <a:ext cx="11391309" cy="352188"/>
+          </a:xfrm>
+        </p:spPr>
+        <p:txBody>
+          <a:bodyPr/>
+          <a:lstStyle/>
+          <a:p>
+            <a:pPr algn="ctr"/>
+            <a:r>
+              <a:rPr lang="ko-KR" altLang="en-US" dirty="0"/>
+              <a:t>채팅을 </a:t>
+            </a:r>
+            <a:r>
+              <a:rPr lang="ko-KR" altLang="en-US" dirty="0" err="1"/>
+              <a:t>치다보면</a:t>
+            </a:r>
+            <a:r>
+              <a:rPr lang="ko-KR" altLang="en-US" dirty="0"/>
+              <a:t> 랜덤으로 나오는 북극곰 이모티콘</a:t>
+            </a:r>
+          </a:p>
+        </p:txBody>
+      </p:sp>
+      <p:pic>
+        <p:nvPicPr>
+          <p:cNvPr id="7" name="그림 6">
+            <a:extLst>
+              <a:ext uri="{FF2B5EF4-FFF2-40B4-BE49-F238E27FC236}">
+                <a16:creationId xmlns:a16="http://schemas.microsoft.com/office/drawing/2014/main" id="{AE5E04DA-7FD9-3F51-CCF7-2544B04A6E5A}"/>
+              </a:ext>
+            </a:extLst>
+          </p:cNvPr>
+          <p:cNvPicPr>
+            <a:picLocks noChangeAspect="1"/>
+          </p:cNvPicPr>
+          <p:nvPr/>
+        </p:nvPicPr>
+        <p:blipFill>
+          <a:blip r:embed="rId2"/>
+          <a:srcRect l="28541" t="77987" r="15191"/>
+          <a:stretch>
+            <a:fillRect/>
+          </a:stretch>
+        </p:blipFill>
+        <p:spPr>
+          <a:xfrm>
+            <a:off x="2082207" y="4485300"/>
+            <a:ext cx="8027582" cy="1668366"/>
+          </a:xfrm>
+          <a:prstGeom prst="rect">
+            <a:avLst/>
+          </a:prstGeom>
+        </p:spPr>
+      </p:pic>
+      <p:sp>
+        <p:nvSpPr>
+          <p:cNvPr id="16" name="타원 15">
+            <a:extLst>
+              <a:ext uri="{FF2B5EF4-FFF2-40B4-BE49-F238E27FC236}">
+                <a16:creationId xmlns:a16="http://schemas.microsoft.com/office/drawing/2014/main" id="{03A88E70-9971-7D31-25D9-A63C4B049197}"/>
+              </a:ext>
+            </a:extLst>
+          </p:cNvPr>
+          <p:cNvSpPr/>
+          <p:nvPr/>
+        </p:nvSpPr>
+        <p:spPr>
+          <a:xfrm>
+            <a:off x="2636948" y="5059125"/>
+            <a:ext cx="376415" cy="355042"/>
+          </a:xfrm>
+          <a:prstGeom prst="ellipse">
+            <a:avLst/>
+          </a:prstGeom>
+          <a:noFill/>
+          <a:ln w="76200">
+            <a:solidFill>
+              <a:srgbClr val="FF0000">
+                <a:alpha val="25000"/>
+              </a:srgbClr>
+            </a:solidFill>
+          </a:ln>
+        </p:spPr>
+        <p:style>
+          <a:lnRef idx="2">
+            <a:schemeClr val="accent1">
+              <a:shade val="15000"/>
+            </a:schemeClr>
+          </a:lnRef>
+          <a:fillRef idx="1">
+            <a:schemeClr val="accent1"/>
+          </a:fillRef>
+          <a:effectRef idx="0">
+            <a:schemeClr val="accent1"/>
+          </a:effectRef>
+          <a:fontRef idx="minor">
+            <a:schemeClr val="lt1"/>
+          </a:fontRef>
+        </p:style>
+        <p:txBody>
+          <a:bodyPr rtlCol="0" anchor="ctr"/>
+          <a:lstStyle/>
+          <a:p>
+            <a:pPr algn="ctr"/>
+            <a:endParaRPr lang="ko-KR" altLang="en-US"/>
+          </a:p>
+        </p:txBody>
+      </p:sp>
+    </p:spTree>
+    <p:extLst>
+      <p:ext uri="{BB962C8B-B14F-4D97-AF65-F5344CB8AC3E}">
+        <p14:creationId xmlns:p14="http://schemas.microsoft.com/office/powerpoint/2010/main" val="3373521205"/>
+      </p:ext>
+    </p:extLst>
+  </p:cSld>
+  <p:clrMapOvr>
+    <a:masterClrMapping/>
+  </p:clrMapOvr>
+</p:sld>
+</file>
+
+<file path=ppt/slides/slide6.xml><?xml version="1.0" encoding="utf-8"?>
+<p:sld xmlns:a="http://schemas.openxmlformats.org/drawingml/2006/main" xmlns:r="http://schemas.openxmlformats.org/officeDocument/2006/relationships" xmlns:p="http://schemas.openxmlformats.org/presentationml/2006/main">
+  <p:cSld>
+    <p:spTree>
+      <p:nvGrpSpPr>
+        <p:cNvPr id="1" name="">
+          <a:extLst>
+            <a:ext uri="{FF2B5EF4-FFF2-40B4-BE49-F238E27FC236}">
+              <a16:creationId xmlns:a16="http://schemas.microsoft.com/office/drawing/2014/main" id="{1D21A1E2-22CE-6813-E775-63E483EFBF5E}"/>
+            </a:ext>
+          </a:extLst>
+        </p:cNvPr>
+        <p:cNvGrpSpPr/>
+        <p:nvPr/>
+      </p:nvGrpSpPr>
+      <p:grpSpPr>
+        <a:xfrm>
+          <a:off x="0" y="0"/>
+          <a:ext cx="0" cy="0"/>
+          <a:chOff x="0" y="0"/>
+          <a:chExt cx="0" cy="0"/>
+        </a:xfrm>
+      </p:grpSpPr>
+      <p:sp>
+        <p:nvSpPr>
+          <p:cNvPr id="2" name="제목 1">
+            <a:extLst>
+              <a:ext uri="{FF2B5EF4-FFF2-40B4-BE49-F238E27FC236}">
+                <a16:creationId xmlns:a16="http://schemas.microsoft.com/office/drawing/2014/main" id="{7B2C2E95-8E34-2E8D-1420-BED27C749795}"/>
+              </a:ext>
+            </a:extLst>
+          </p:cNvPr>
+          <p:cNvSpPr>
+            <a:spLocks noGrp="1"/>
+          </p:cNvSpPr>
+          <p:nvPr>
+            <p:ph type="title"/>
+          </p:nvPr>
+        </p:nvSpPr>
+        <p:spPr/>
+        <p:txBody>
+          <a:bodyPr/>
+          <a:lstStyle/>
+          <a:p>
+            <a:r>
+              <a:rPr lang="ko-KR" altLang="en-US" dirty="0"/>
+              <a:t>기능 소개</a:t>
+            </a:r>
+          </a:p>
+        </p:txBody>
+      </p:sp>
+      <p:sp>
+        <p:nvSpPr>
+          <p:cNvPr id="3" name="텍스트 개체 틀 2">
+            <a:extLst>
+              <a:ext uri="{FF2B5EF4-FFF2-40B4-BE49-F238E27FC236}">
+                <a16:creationId xmlns:a16="http://schemas.microsoft.com/office/drawing/2014/main" id="{AB6B2C5C-9E7B-4FA2-312C-8DC3703A27C8}"/>
+              </a:ext>
+            </a:extLst>
+          </p:cNvPr>
+          <p:cNvSpPr>
+            <a:spLocks noGrp="1"/>
+          </p:cNvSpPr>
+          <p:nvPr>
+            <p:ph type="body" idx="1"/>
+          </p:nvPr>
+        </p:nvSpPr>
+        <p:spPr>
+          <a:xfrm>
+            <a:off x="400344" y="6153666"/>
+            <a:ext cx="11391309" cy="352188"/>
+          </a:xfrm>
+        </p:spPr>
+        <p:txBody>
+          <a:bodyPr/>
+          <a:lstStyle/>
+          <a:p>
+            <a:pPr algn="ctr"/>
+            <a:r>
+              <a:rPr lang="ko-KR" altLang="en-US" dirty="0"/>
+              <a:t>궁금한 걸 물어봐도 절대 대답 안해주는 </a:t>
+            </a:r>
+            <a:r>
+              <a:rPr lang="en-US" altLang="ko-KR" dirty="0"/>
+              <a:t>AI </a:t>
+            </a:r>
+            <a:r>
+              <a:rPr lang="ko-KR" altLang="en-US" dirty="0"/>
+              <a:t>모델</a:t>
+            </a:r>
+          </a:p>
+        </p:txBody>
+      </p:sp>
+      <p:pic>
+        <p:nvPicPr>
+          <p:cNvPr id="7" name="그림 6">
+            <a:extLst>
+              <a:ext uri="{FF2B5EF4-FFF2-40B4-BE49-F238E27FC236}">
+                <a16:creationId xmlns:a16="http://schemas.microsoft.com/office/drawing/2014/main" id="{3D791844-287C-9D51-0AB6-C4E09369E4B5}"/>
+              </a:ext>
+            </a:extLst>
+          </p:cNvPr>
+          <p:cNvPicPr>
+            <a:picLocks noChangeAspect="1"/>
+          </p:cNvPicPr>
+          <p:nvPr/>
+        </p:nvPicPr>
+        <p:blipFill>
+          <a:blip r:embed="rId2">
+            <a:extLst>
+              <a:ext uri="{28A0092B-C50C-407E-A947-70E740481C1C}">
+                <a14:useLocalDpi xmlns:a14="http://schemas.microsoft.com/office/drawing/2010/main" val="0"/>
+              </a:ext>
+            </a:extLst>
+          </a:blip>
+          <a:srcRect l="28656" t="21058" r="15620"/>
+          <a:stretch>
+            <a:fillRect/>
+          </a:stretch>
+        </p:blipFill>
+        <p:spPr>
+          <a:xfrm>
+            <a:off x="2905991" y="1262088"/>
+            <a:ext cx="6380018" cy="4801634"/>
+          </a:xfrm>
+          <a:prstGeom prst="rect">
+            <a:avLst/>
+          </a:prstGeom>
+        </p:spPr>
+      </p:pic>
+      <p:sp>
+        <p:nvSpPr>
+          <p:cNvPr id="11" name="직사각형 10">
+            <a:extLst>
+              <a:ext uri="{FF2B5EF4-FFF2-40B4-BE49-F238E27FC236}">
+                <a16:creationId xmlns:a16="http://schemas.microsoft.com/office/drawing/2014/main" id="{FF43B4AF-FA4B-CE0A-7F44-80CD439AC42A}"/>
+              </a:ext>
+            </a:extLst>
+          </p:cNvPr>
+          <p:cNvSpPr/>
+          <p:nvPr/>
+        </p:nvSpPr>
+        <p:spPr>
+          <a:xfrm>
+            <a:off x="4974903" y="2052084"/>
+            <a:ext cx="2046927" cy="179052"/>
+          </a:xfrm>
+          <a:prstGeom prst="rect">
+            <a:avLst/>
+          </a:prstGeom>
+          <a:solidFill>
+            <a:srgbClr val="FF0000">
+              <a:alpha val="25000"/>
+            </a:srgbClr>
+          </a:solidFill>
+          <a:ln>
+            <a:noFill/>
+          </a:ln>
+        </p:spPr>
+        <p:style>
+          <a:lnRef idx="2">
+            <a:schemeClr val="accent1">
+              <a:shade val="15000"/>
+            </a:schemeClr>
+          </a:lnRef>
+          <a:fillRef idx="1">
+            <a:schemeClr val="accent1"/>
+          </a:fillRef>
+          <a:effectRef idx="0">
+            <a:schemeClr val="accent1"/>
+          </a:effectRef>
+          <a:fontRef idx="minor">
+            <a:schemeClr val="lt1"/>
+          </a:fontRef>
+        </p:style>
+        <p:txBody>
+          <a:bodyPr rtlCol="0" anchor="ctr"/>
+          <a:lstStyle/>
+          <a:p>
+            <a:pPr algn="ctr"/>
+            <a:endParaRPr lang="ko-KR" altLang="en-US"/>
+          </a:p>
+        </p:txBody>
+      </p:sp>
+      <p:sp>
+        <p:nvSpPr>
+          <p:cNvPr id="12" name="직사각형 11">
+            <a:extLst>
+              <a:ext uri="{FF2B5EF4-FFF2-40B4-BE49-F238E27FC236}">
+                <a16:creationId xmlns:a16="http://schemas.microsoft.com/office/drawing/2014/main" id="{5656FCCD-AFD4-858B-001C-E3AB269FB3B9}"/>
+              </a:ext>
+            </a:extLst>
+          </p:cNvPr>
+          <p:cNvSpPr/>
+          <p:nvPr/>
+        </p:nvSpPr>
+        <p:spPr>
+          <a:xfrm>
+            <a:off x="3675693" y="2842080"/>
+            <a:ext cx="3136587" cy="179052"/>
+          </a:xfrm>
+          <a:prstGeom prst="rect">
+            <a:avLst/>
+          </a:prstGeom>
+          <a:solidFill>
+            <a:srgbClr val="FF0000">
+              <a:alpha val="25000"/>
+            </a:srgbClr>
+          </a:solidFill>
+          <a:ln>
+            <a:noFill/>
+          </a:ln>
+        </p:spPr>
+        <p:style>
+          <a:lnRef idx="2">
+            <a:schemeClr val="accent1">
+              <a:shade val="15000"/>
+            </a:schemeClr>
+          </a:lnRef>
+          <a:fillRef idx="1">
+            <a:schemeClr val="accent1"/>
+          </a:fillRef>
+          <a:effectRef idx="0">
+            <a:schemeClr val="accent1"/>
+          </a:effectRef>
+          <a:fontRef idx="minor">
+            <a:schemeClr val="lt1"/>
+          </a:fontRef>
+        </p:style>
+        <p:txBody>
+          <a:bodyPr rtlCol="0" anchor="ctr"/>
+          <a:lstStyle/>
+          <a:p>
+            <a:pPr algn="ctr"/>
+            <a:endParaRPr lang="ko-KR" altLang="en-US"/>
+          </a:p>
+        </p:txBody>
+      </p:sp>
+    </p:spTree>
+    <p:extLst>
+      <p:ext uri="{BB962C8B-B14F-4D97-AF65-F5344CB8AC3E}">
+        <p14:creationId xmlns:p14="http://schemas.microsoft.com/office/powerpoint/2010/main" val="2015215792"/>
+      </p:ext>
+    </p:extLst>
+  </p:cSld>
+  <p:clrMapOvr>
+    <a:masterClrMapping/>
+  </p:clrMapOvr>
+</p:sld>
+</file>
+
+<file path=ppt/slides/slide7.xml><?xml version="1.0" encoding="utf-8"?>
+<p:sld xmlns:a="http://schemas.openxmlformats.org/drawingml/2006/main" xmlns:r="http://schemas.openxmlformats.org/officeDocument/2006/relationships" xmlns:p="http://schemas.openxmlformats.org/presentationml/2006/main">
+  <p:cSld>
+    <p:spTree>
+      <p:nvGrpSpPr>
+        <p:cNvPr id="1" name="">
+          <a:extLst>
+            <a:ext uri="{FF2B5EF4-FFF2-40B4-BE49-F238E27FC236}">
+              <a16:creationId xmlns:a16="http://schemas.microsoft.com/office/drawing/2014/main" id="{EC5C4C31-D413-9DDE-81D2-0D4DEB1F93CC}"/>
+            </a:ext>
+          </a:extLst>
+        </p:cNvPr>
+        <p:cNvGrpSpPr/>
+        <p:nvPr/>
+      </p:nvGrpSpPr>
+      <p:grpSpPr>
+        <a:xfrm>
+          <a:off x="0" y="0"/>
+          <a:ext cx="0" cy="0"/>
+          <a:chOff x="0" y="0"/>
+          <a:chExt cx="0" cy="0"/>
+        </a:xfrm>
+      </p:grpSpPr>
+      <p:sp>
+        <p:nvSpPr>
+          <p:cNvPr id="2" name="제목 1">
+            <a:extLst>
+              <a:ext uri="{FF2B5EF4-FFF2-40B4-BE49-F238E27FC236}">
+                <a16:creationId xmlns:a16="http://schemas.microsoft.com/office/drawing/2014/main" id="{ADCFD048-CA79-1A94-C381-606AB50E20D9}"/>
+              </a:ext>
+            </a:extLst>
+          </p:cNvPr>
+          <p:cNvSpPr>
+            <a:spLocks noGrp="1"/>
+          </p:cNvSpPr>
+          <p:nvPr>
+            <p:ph type="title"/>
+          </p:nvPr>
+        </p:nvSpPr>
+        <p:spPr/>
+        <p:txBody>
+          <a:bodyPr/>
+          <a:lstStyle/>
+          <a:p>
+            <a:r>
+              <a:rPr lang="ko-KR" altLang="en-US" dirty="0"/>
+              <a:t>기능 소개</a:t>
+            </a:r>
+          </a:p>
+        </p:txBody>
+      </p:sp>
+      <p:sp>
+        <p:nvSpPr>
+          <p:cNvPr id="3" name="텍스트 개체 틀 2">
+            <a:extLst>
+              <a:ext uri="{FF2B5EF4-FFF2-40B4-BE49-F238E27FC236}">
+                <a16:creationId xmlns:a16="http://schemas.microsoft.com/office/drawing/2014/main" id="{DD0F11DC-BB6B-4839-0A9C-1AF416E94A10}"/>
+              </a:ext>
+            </a:extLst>
+          </p:cNvPr>
+          <p:cNvSpPr>
+            <a:spLocks noGrp="1"/>
+          </p:cNvSpPr>
+          <p:nvPr>
+            <p:ph type="body" idx="1"/>
+          </p:nvPr>
+        </p:nvSpPr>
+        <p:spPr>
+          <a:xfrm>
+            <a:off x="400344" y="6153666"/>
+            <a:ext cx="11391309" cy="352188"/>
+          </a:xfrm>
+        </p:spPr>
+        <p:txBody>
+          <a:bodyPr/>
+          <a:lstStyle/>
+          <a:p>
+            <a:pPr algn="ctr"/>
+            <a:r>
+              <a:rPr lang="ko-KR" altLang="en-US" dirty="0"/>
+              <a:t>사용된 탄소의 양에 따라 최대 글자 입력 제한 </a:t>
+            </a:r>
+            <a:r>
+              <a:rPr lang="en-US" altLang="ko-KR" dirty="0"/>
+              <a:t>(</a:t>
+            </a:r>
+            <a:r>
+              <a:rPr lang="ko-KR" altLang="en-US" dirty="0"/>
+              <a:t>빙하가 녹아 물이 차기 시작하는 </a:t>
+            </a:r>
+            <a:r>
+              <a:rPr lang="ko-KR" altLang="en-US" dirty="0" err="1"/>
+              <a:t>입력창</a:t>
+            </a:r>
+            <a:r>
+              <a:rPr lang="en-US" altLang="ko-KR" dirty="0"/>
+              <a:t>)</a:t>
+            </a:r>
+            <a:endParaRPr lang="ko-KR" altLang="en-US" dirty="0"/>
+          </a:p>
+        </p:txBody>
+      </p:sp>
+      <p:pic>
+        <p:nvPicPr>
+          <p:cNvPr id="9" name="그림 8">
+            <a:extLst>
+              <a:ext uri="{FF2B5EF4-FFF2-40B4-BE49-F238E27FC236}">
+                <a16:creationId xmlns:a16="http://schemas.microsoft.com/office/drawing/2014/main" id="{61B3C451-72BB-B28B-36EA-637E15A520F9}"/>
+              </a:ext>
+            </a:extLst>
+          </p:cNvPr>
+          <p:cNvPicPr>
+            <a:picLocks noChangeAspect="1"/>
+          </p:cNvPicPr>
+          <p:nvPr/>
+        </p:nvPicPr>
+        <p:blipFill>
+          <a:blip r:embed="rId2">
+            <a:extLst>
+              <a:ext uri="{28A0092B-C50C-407E-A947-70E740481C1C}">
+                <a14:useLocalDpi xmlns:a14="http://schemas.microsoft.com/office/drawing/2010/main" val="0"/>
+              </a:ext>
+            </a:extLst>
+          </a:blip>
+          <a:srcRect l="29073" t="73205" r="15090"/>
+          <a:stretch>
+            <a:fillRect/>
+          </a:stretch>
+        </p:blipFill>
+        <p:spPr>
+          <a:xfrm>
+            <a:off x="1961087" y="3850358"/>
+            <a:ext cx="8269822" cy="2108304"/>
+          </a:xfrm>
+          <a:prstGeom prst="rect">
+            <a:avLst/>
+          </a:prstGeom>
+        </p:spPr>
+      </p:pic>
+      <p:sp>
+        <p:nvSpPr>
+          <p:cNvPr id="5" name="타원 4">
+            <a:extLst>
+              <a:ext uri="{FF2B5EF4-FFF2-40B4-BE49-F238E27FC236}">
+                <a16:creationId xmlns:a16="http://schemas.microsoft.com/office/drawing/2014/main" id="{5EB010F2-203E-F6C3-A7A6-84656442C694}"/>
+              </a:ext>
+            </a:extLst>
+          </p:cNvPr>
+          <p:cNvSpPr/>
+          <p:nvPr/>
+        </p:nvSpPr>
+        <p:spPr>
+          <a:xfrm>
+            <a:off x="9598857" y="5308507"/>
+            <a:ext cx="376415" cy="355042"/>
+          </a:xfrm>
+          <a:prstGeom prst="ellipse">
+            <a:avLst/>
+          </a:prstGeom>
+          <a:noFill/>
+          <a:ln w="76200">
+            <a:solidFill>
+              <a:srgbClr val="FF0000">
+                <a:alpha val="25000"/>
+              </a:srgbClr>
+            </a:solidFill>
+          </a:ln>
+        </p:spPr>
+        <p:style>
+          <a:lnRef idx="2">
+            <a:schemeClr val="accent1">
+              <a:shade val="15000"/>
+            </a:schemeClr>
+          </a:lnRef>
+          <a:fillRef idx="1">
+            <a:schemeClr val="accent1"/>
+          </a:fillRef>
+          <a:effectRef idx="0">
+            <a:schemeClr val="accent1"/>
+          </a:effectRef>
+          <a:fontRef idx="minor">
+            <a:schemeClr val="lt1"/>
+          </a:fontRef>
+        </p:style>
+        <p:txBody>
+          <a:bodyPr rtlCol="0" anchor="ctr"/>
+          <a:lstStyle/>
+          <a:p>
+            <a:pPr algn="ctr"/>
+            <a:endParaRPr lang="ko-KR" altLang="en-US"/>
+          </a:p>
+        </p:txBody>
+      </p:sp>
+      <p:sp>
+        <p:nvSpPr>
+          <p:cNvPr id="12" name="TextBox 11">
+            <a:extLst>
+              <a:ext uri="{FF2B5EF4-FFF2-40B4-BE49-F238E27FC236}">
+                <a16:creationId xmlns:a16="http://schemas.microsoft.com/office/drawing/2014/main" id="{BD58C978-0786-BD89-3F8B-FD4BBD726AD1}"/>
+              </a:ext>
+            </a:extLst>
+          </p:cNvPr>
+          <p:cNvSpPr txBox="1"/>
+          <p:nvPr/>
+        </p:nvSpPr>
+        <p:spPr>
+          <a:xfrm>
+            <a:off x="7367155" y="3002973"/>
+            <a:ext cx="835485" cy="369332"/>
+          </a:xfrm>
+          <a:prstGeom prst="rect">
+            <a:avLst/>
+          </a:prstGeom>
+          <a:noFill/>
+        </p:spPr>
+        <p:txBody>
+          <a:bodyPr wrap="none" rtlCol="0">
+            <a:spAutoFit/>
+          </a:bodyPr>
+          <a:lstStyle/>
+          <a:p>
+            <a:r>
+              <a:rPr lang="ko-KR" altLang="en-US" dirty="0">
+                <a:solidFill>
+                  <a:schemeClr val="tx1">
+                    <a:lumMod val="85000"/>
+                    <a:lumOff val="15000"/>
+                  </a:schemeClr>
+                </a:solidFill>
+                <a:latin typeface="Pretendard SemiBold" panose="02000703000000020004" pitchFamily="50" charset="-127"/>
+                <a:ea typeface="Pretendard SemiBold" panose="02000703000000020004" pitchFamily="50" charset="-127"/>
+                <a:cs typeface="Pretendard SemiBold" panose="02000703000000020004" pitchFamily="50" charset="-127"/>
+              </a:rPr>
+              <a:t>이를 통</a:t>
+            </a:r>
+          </a:p>
+        </p:txBody>
+      </p:sp>
+    </p:spTree>
+    <p:extLst>
+      <p:ext uri="{BB962C8B-B14F-4D97-AF65-F5344CB8AC3E}">
+        <p14:creationId xmlns:p14="http://schemas.microsoft.com/office/powerpoint/2010/main" val="4140060857"/>
+      </p:ext>
+    </p:extLst>
+  </p:cSld>
+  <p:clrMapOvr>
+    <a:masterClrMapping/>
+  </p:clrMapOvr>
+</p:sld>
+</file>
+
+<file path=ppt/slides/slide8.xml><?xml version="1.0" encoding="utf-8"?>
+<p:sld xmlns:a="http://schemas.openxmlformats.org/drawingml/2006/main" xmlns:r="http://schemas.openxmlformats.org/officeDocument/2006/relationships" xmlns:p="http://schemas.openxmlformats.org/presentationml/2006/main">
+  <p:cSld>
+    <p:spTree>
+      <p:nvGrpSpPr>
+        <p:cNvPr id="1" name="">
+          <a:extLst>
+            <a:ext uri="{FF2B5EF4-FFF2-40B4-BE49-F238E27FC236}">
+              <a16:creationId xmlns:a16="http://schemas.microsoft.com/office/drawing/2014/main" id="{C9560044-B091-0896-B6BD-EA0CEA0AC631}"/>
+            </a:ext>
+          </a:extLst>
+        </p:cNvPr>
+        <p:cNvGrpSpPr/>
+        <p:nvPr/>
+      </p:nvGrpSpPr>
+      <p:grpSpPr>
+        <a:xfrm>
+          <a:off x="0" y="0"/>
+          <a:ext cx="0" cy="0"/>
+          <a:chOff x="0" y="0"/>
+          <a:chExt cx="0" cy="0"/>
+        </a:xfrm>
+      </p:grpSpPr>
+      <p:sp>
+        <p:nvSpPr>
+          <p:cNvPr id="2" name="제목 1">
+            <a:extLst>
+              <a:ext uri="{FF2B5EF4-FFF2-40B4-BE49-F238E27FC236}">
+                <a16:creationId xmlns:a16="http://schemas.microsoft.com/office/drawing/2014/main" id="{AF142F41-8D06-F296-6F34-FFD9948F0036}"/>
+              </a:ext>
+            </a:extLst>
+          </p:cNvPr>
+          <p:cNvSpPr>
+            <a:spLocks noGrp="1"/>
+          </p:cNvSpPr>
+          <p:nvPr>
+            <p:ph type="title"/>
+          </p:nvPr>
+        </p:nvSpPr>
+        <p:spPr/>
+        <p:txBody>
+          <a:bodyPr/>
+          <a:lstStyle/>
+          <a:p>
+            <a:r>
+              <a:rPr lang="ko-KR" altLang="en-US" dirty="0"/>
+              <a:t>기능 소개</a:t>
+            </a:r>
+          </a:p>
+        </p:txBody>
+      </p:sp>
+      <p:sp>
+        <p:nvSpPr>
+          <p:cNvPr id="3" name="텍스트 개체 틀 2">
+            <a:extLst>
+              <a:ext uri="{FF2B5EF4-FFF2-40B4-BE49-F238E27FC236}">
+                <a16:creationId xmlns:a16="http://schemas.microsoft.com/office/drawing/2014/main" id="{63ACE97E-4E6C-6825-175D-1D21590DD5BA}"/>
+              </a:ext>
+            </a:extLst>
+          </p:cNvPr>
+          <p:cNvSpPr>
+            <a:spLocks noGrp="1"/>
+          </p:cNvSpPr>
+          <p:nvPr>
+            <p:ph type="body" idx="1"/>
+          </p:nvPr>
+        </p:nvSpPr>
+        <p:spPr>
+          <a:xfrm>
+            <a:off x="400344" y="6153666"/>
+            <a:ext cx="11391309" cy="352188"/>
+          </a:xfrm>
+        </p:spPr>
+        <p:txBody>
+          <a:bodyPr/>
+          <a:lstStyle/>
+          <a:p>
+            <a:pPr algn="ctr"/>
+            <a:r>
+              <a:rPr lang="ko-KR" altLang="en-US" dirty="0"/>
+              <a:t>내 탄소 발자국과 사이트 이용자들의 탄소 사용 합계 확인</a:t>
+            </a:r>
+          </a:p>
+        </p:txBody>
+      </p:sp>
+      <p:pic>
+        <p:nvPicPr>
+          <p:cNvPr id="10" name="그림 9">
+            <a:extLst>
+              <a:ext uri="{FF2B5EF4-FFF2-40B4-BE49-F238E27FC236}">
+                <a16:creationId xmlns:a16="http://schemas.microsoft.com/office/drawing/2014/main" id="{01A14F06-D65B-7919-10E7-A24679813B0C}"/>
+              </a:ext>
+            </a:extLst>
+          </p:cNvPr>
+          <p:cNvPicPr>
+            <a:picLocks noChangeAspect="1"/>
+          </p:cNvPicPr>
+          <p:nvPr/>
+        </p:nvPicPr>
+        <p:blipFill>
+          <a:blip r:embed="rId2">
+            <a:extLst>
+              <a:ext uri="{28A0092B-C50C-407E-A947-70E740481C1C}">
+                <a14:useLocalDpi xmlns:a14="http://schemas.microsoft.com/office/drawing/2010/main" val="0"/>
+              </a:ext>
+            </a:extLst>
+          </a:blip>
+          <a:srcRect l="19128" t="20224" r="23154"/>
+          <a:stretch>
+            <a:fillRect/>
+          </a:stretch>
+        </p:blipFill>
+        <p:spPr>
+          <a:xfrm>
+            <a:off x="2745289" y="1143000"/>
+            <a:ext cx="6701417" cy="4920722"/>
+          </a:xfrm>
+          <a:prstGeom prst="rect">
+            <a:avLst/>
+          </a:prstGeom>
+        </p:spPr>
+      </p:pic>
+    </p:spTree>
+    <p:extLst>
+      <p:ext uri="{BB962C8B-B14F-4D97-AF65-F5344CB8AC3E}">
+        <p14:creationId xmlns:p14="http://schemas.microsoft.com/office/powerpoint/2010/main" val="463235731"/>
+      </p:ext>
+    </p:extLst>
+  </p:cSld>
+  <p:clrMapOvr>
+    <a:masterClrMapping/>
+  </p:clrMapOvr>
+</p:sld>
+</file>
+
 <file path=ppt/theme/theme1.xml><?xml version="1.0" encoding="utf-8"?>
+<a:theme xmlns:a="http://schemas.openxmlformats.org/drawingml/2006/main" name="Office 테마">
+  <a:themeElements>
+    <a:clrScheme name="Office">
+      <a:dk1>
+        <a:sysClr val="windowText" lastClr="000000"/>
+      </a:dk1>
+      <a:lt1>
+        <a:sysClr val="window" lastClr="FFFFFF"/>
+      </a:lt1>
+      <a:dk2>
+        <a:srgbClr val="0E2841"/>
+      </a:dk2>
+      <a:lt2>
+        <a:srgbClr val="E8E8E8"/>
+      </a:lt2>
+      <a:accent1>
+        <a:srgbClr val="156082"/>
+      </a:accent1>
+      <a:accent2>
+        <a:srgbClr val="E97132"/>
+      </a:accent2>
+      <a:accent3>
+        <a:srgbClr val="196B24"/>
+      </a:accent3>
+      <a:accent4>
+        <a:srgbClr val="0F9ED5"/>
+      </a:accent4>
+      <a:accent5>
+        <a:srgbClr val="A02B93"/>
+      </a:accent5>
+      <a:accent6>
+        <a:srgbClr val="4EA72E"/>
+      </a:accent6>
+      <a:hlink>
+        <a:srgbClr val="467886"/>
+      </a:hlink>
+      <a:folHlink>
+        <a:srgbClr val="96607D"/>
+      </a:folHlink>
+    </a:clrScheme>
+    <a:fontScheme name="Office">
+      <a:majorFont>
+        <a:latin typeface="맑은 고딕" panose="02110004020202020204"/>
+        <a:ea typeface=""/>
+        <a:cs typeface=""/>
+        <a:font script="Jpan" typeface="游ゴシック Light"/>
+        <a:font script="Hang" typeface="맑은 고딕"/>
+        <a:font script="Hans" typeface="等线 Light"/>
+        <a:font script="Hant" typeface="新細明體"/>
+        <a:font script="Arab" typeface="Times New Roman"/>
+        <a:font script="Hebr" typeface="Times New Roman"/>
+        <a:font script="Thai" typeface="Angsana New"/>
+        <a:font script="Ethi" typeface="Nyala"/>
+        <a:font script="Beng" typeface="Vrinda"/>
+        <a:font script="Gujr" typeface="Shruti"/>
+        <a:font script="Khmr" typeface="MoolBoran"/>
+        <a:font script="Knda" typeface="Tunga"/>
+        <a:font script="Guru" typeface="Raavi"/>
+        <a:font script="Cans" typeface="Euphemia"/>
+        <a:font script="Cher" typeface="Plantagenet Cherokee"/>
+        <a:font script="Yiii" typeface="Microsoft Yi Baiti"/>
+        <a:font script="Tibt" typeface="Microsoft Himalaya"/>
+        <a:font script="Thaa" typeface="MV Boli"/>
+        <a:font script="Deva" typeface="Mangal"/>
+        <a:font script="Telu" typeface="Gautami"/>
+        <a:font script="Taml" typeface="Latha"/>
+        <a:font script="Syrc" typeface="Estrangelo Edessa"/>
+        <a:font script="Orya" typeface="Kalinga"/>
+        <a:font script="Mlym" typeface="Kartika"/>
+        <a:font script="Laoo" typeface="DokChampa"/>
+        <a:font script="Sinh" typeface="Iskoola Pota"/>
+        <a:font script="Mong" typeface="Mongolian Baiti"/>
+        <a:font script="Viet" typeface="Times New Roman"/>
+        <a:font script="Uigh" typeface="Microsoft Uighur"/>
+        <a:font script="Geor" typeface="Sylfaen"/>
+        <a:font script="Armn" typeface="Arial"/>
+        <a:font script="Bugi" typeface="Leelawadee UI"/>
+        <a:font script="Bopo" typeface="Microsoft JhengHei"/>
+        <a:font script="Java" typeface="Javanese Text"/>
+        <a:font script="Lisu" typeface="Segoe UI"/>
+        <a:font script="Mymr" typeface="Myanmar Text"/>
+        <a:font script="Nkoo" typeface="Ebrima"/>
+        <a:font script="Olck" typeface="Nirmala UI"/>
+        <a:font script="Osma" typeface="Ebrima"/>
+        <a:font script="Phag" typeface="Phagspa"/>
+        <a:font script="Syrn" typeface="Estrangelo Edessa"/>
+        <a:font script="Syrj" typeface="Estrangelo Edessa"/>
+        <a:font script="Syre" typeface="Estrangelo Edessa"/>
+        <a:font script="Sora" typeface="Nirmala UI"/>
+        <a:font script="Tale" typeface="Microsoft Tai Le"/>
+        <a:font script="Talu" typeface="Microsoft New Tai Lue"/>
+        <a:font script="Tfng" typeface="Ebrima"/>
+      </a:majorFont>
+      <a:minorFont>
+        <a:latin typeface="맑은 고딕" panose="02110004020202020204"/>
+        <a:ea typeface=""/>
+        <a:cs typeface=""/>
+        <a:font script="Jpan" typeface="游ゴシック"/>
+        <a:font script="Hang" typeface="맑은 고딕"/>
+        <a:font script="Hans" typeface="等线"/>
+        <a:font script="Hant" typeface="新細明體"/>
+        <a:font script="Arab" typeface="Arial"/>
+        <a:font script="Hebr" typeface="Arial"/>
+        <a:font script="Thai" typeface="Cordia New"/>
+        <a:font script="Ethi" typeface="Nyala"/>
+        <a:font script="Beng" typeface="Vrinda"/>
+        <a:font script="Gujr" typeface="Shruti"/>
+        <a:font script="Khmr" typeface="DaunPenh"/>
+        <a:font script="Knda" typeface="Tunga"/>
+        <a:font script="Guru" typeface="Raavi"/>
+        <a:font script="Cans" typeface="Euphemia"/>
+        <a:font script="Cher" typeface="Plantagenet Cherokee"/>
+        <a:font script="Yiii" typeface="Microsoft Yi Baiti"/>
+        <a:font script="Tibt" typeface="Microsoft Himalaya"/>
+        <a:font script="Thaa" typeface="MV Boli"/>
+        <a:font script="Deva" typeface="Mangal"/>
+        <a:font script="Telu" typeface="Gautami"/>
+        <a:font script="Taml" typeface="Latha"/>
+        <a:font script="Syrc" typeface="Estrangelo Edessa"/>
+        <a:font script="Orya" typeface="Kalinga"/>
+        <a:font script="Mlym" typeface="Kartika"/>
+        <a:font script="Laoo" typeface="DokChampa"/>
+        <a:font script="Sinh" typeface="Iskoola Pota"/>
+        <a:font script="Mong" typeface="Mongolian Baiti"/>
+        <a:font script="Viet" typeface="Arial"/>
+        <a:font script="Uigh" typeface="Microsoft Uighur"/>
+        <a:font script="Geor" typeface="Sylfaen"/>
+        <a:font script="Armn" typeface="Arial"/>
+        <a:font script="Bugi" typeface="Leelawadee UI"/>
+        <a:font script="Bopo" typeface="Microsoft JhengHei"/>
+        <a:font script="Java" typeface="Javanese Text"/>
+        <a:font script="Lisu" typeface="Segoe UI"/>
+        <a:font script="Mymr" typeface="Myanmar Text"/>
+        <a:font script="Nkoo" typeface="Ebrima"/>
+        <a:font script="Olck" typeface="Nirmala UI"/>
+        <a:font script="Osma" typeface="Ebrima"/>
+        <a:font script="Phag" typeface="Phagspa"/>
+        <a:font script="Syrn" typeface="Estrangelo Edessa"/>
+        <a:font script="Syrj" typeface="Estrangelo Edessa"/>
+        <a:font script="Syre" typeface="Estrangelo Edessa"/>
+        <a:font script="Sora" typeface="Nirmala UI"/>
+        <a:font script="Tale" typeface="Microsoft Tai Le"/>
+        <a:font script="Talu" typeface="Microsoft New Tai Lue"/>
+        <a:font script="Tfng" typeface="Ebrima"/>
+      </a:minorFont>
+    </a:fontScheme>
+    <a:fmtScheme name="Office">
+      <a:fillStyleLst>
+        <a:solidFill>
+          <a:schemeClr val="phClr"/>
+        </a:solidFill>
+        <a:gradFill rotWithShape="1">
+          <a:gsLst>
+            <a:gs pos="0">
+              <a:schemeClr val="phClr">
+                <a:lumMod val="110000"/>
+                <a:satMod val="105000"/>
+                <a:tint val="67000"/>
+              </a:schemeClr>
+            </a:gs>
+            <a:gs pos="50000">
+              <a:schemeClr val="phClr">
+                <a:lumMod val="105000"/>
+                <a:satMod val="103000"/>
+                <a:tint val="73000"/>
+              </a:schemeClr>
+            </a:gs>
+            <a:gs pos="100000">
+              <a:schemeClr val="phClr">
+                <a:lumMod val="105000"/>
+                <a:satMod val="109000"/>
+                <a:tint val="81000"/>
+              </a:schemeClr>
+            </a:gs>
+          </a:gsLst>
+          <a:lin ang="5400000" scaled="0"/>
+        </a:gradFill>
+        <a:gradFill rotWithShape="1">
+          <a:gsLst>
+            <a:gs pos="0">
+              <a:schemeClr val="phClr">
+                <a:satMod val="103000"/>
+                <a:lumMod val="102000"/>
+                <a:tint val="94000"/>
+              </a:schemeClr>
+            </a:gs>
+            <a:gs pos="50000">
+              <a:schemeClr val="phClr">
+                <a:satMod val="110000"/>
+                <a:lumMod val="100000"/>
+                <a:shade val="100000"/>
+              </a:schemeClr>
+            </a:gs>
+            <a:gs pos="100000">
+              <a:schemeClr val="phClr">
+                <a:lumMod val="99000"/>
+                <a:satMod val="120000"/>
+                <a:shade val="78000"/>
+              </a:schemeClr>
+            </a:gs>
+          </a:gsLst>
+          <a:lin ang="5400000" scaled="0"/>
+        </a:gradFill>
+      </a:fillStyleLst>
+      <a:lnStyleLst>
+        <a:ln w="12700" cap="flat" cmpd="sng" algn="ctr">
+          <a:solidFill>
+            <a:schemeClr val="phClr"/>
+          </a:solidFill>
+          <a:prstDash val="solid"/>
+          <a:miter lim="800000"/>
+        </a:ln>
+        <a:ln w="19050" cap="flat" cmpd="sng" algn="ctr">
+          <a:solidFill>
+            <a:schemeClr val="phClr"/>
+          </a:solidFill>
+          <a:prstDash val="solid"/>
+          <a:miter lim="800000"/>
+        </a:ln>
+        <a:ln w="25400" cap="flat" cmpd="sng" algn="ctr">
+          <a:solidFill>
+            <a:schemeClr val="phClr"/>
+          </a:solidFill>
+          <a:prstDash val="solid"/>
+          <a:miter lim="800000"/>
+        </a:ln>
+      </a:lnStyleLst>
+      <a:effectStyleLst>
+        <a:effectStyle>
+          <a:effectLst/>
+        </a:effectStyle>
+        <a:effectStyle>
+          <a:effectLst/>
+        </a:effectStyle>
+        <a:effectStyle>
+          <a:effectLst>
+            <a:outerShdw blurRad="57150" dist="19050" dir="5400000" algn="ctr" rotWithShape="0">
+              <a:srgbClr val="000000">
+                <a:alpha val="63000"/>
+              </a:srgbClr>
+            </a:outerShdw>
+          </a:effectLst>
+        </a:effectStyle>
+      </a:effectStyleLst>
+      <a:bgFillStyleLst>
+        <a:solidFill>
+          <a:schemeClr val="phClr"/>
+        </a:solidFill>
+        <a:solidFill>
+          <a:schemeClr val="phClr">
+            <a:tint val="95000"/>
+            <a:satMod val="170000"/>
+          </a:schemeClr>
+        </a:solidFill>
+        <a:gradFill rotWithShape="1">
+          <a:gsLst>
+            <a:gs pos="0">
+              <a:schemeClr val="phClr">
+                <a:tint val="93000"/>
+                <a:satMod val="150000"/>
+                <a:shade val="98000"/>
+                <a:lumMod val="102000"/>
+              </a:schemeClr>
+            </a:gs>
+            <a:gs pos="50000">
+              <a:schemeClr val="phClr">
+                <a:tint val="98000"/>
+                <a:satMod val="130000"/>
+                <a:shade val="90000"/>
+                <a:lumMod val="103000"/>
+              </a:schemeClr>
+            </a:gs>
+            <a:gs pos="100000">
+              <a:schemeClr val="phClr">
+                <a:shade val="63000"/>
+                <a:satMod val="120000"/>
+              </a:schemeClr>
+            </a:gs>
+          </a:gsLst>
+          <a:lin ang="5400000" scaled="0"/>
+        </a:gradFill>
+      </a:bgFillStyleLst>
+    </a:fmtScheme>
+  </a:themeElements>
+  <a:objectDefaults>
+    <a:spDef>
+      <a:spPr>
+        <a:solidFill>
+          <a:srgbClr val="0369A1"/>
+        </a:solidFill>
+        <a:ln>
+          <a:noFill/>
+        </a:ln>
+      </a:spPr>
+      <a:bodyPr rtlCol="0" anchor="ctr"/>
+      <a:lstStyle>
+        <a:defPPr algn="ctr">
+          <a:defRPr/>
+        </a:defPPr>
+      </a:lstStyle>
+      <a:style>
+        <a:lnRef idx="2">
+          <a:schemeClr val="accent1">
+            <a:shade val="15000"/>
+          </a:schemeClr>
+        </a:lnRef>
+        <a:fillRef idx="1">
+          <a:schemeClr val="accent1"/>
+        </a:fillRef>
+        <a:effectRef idx="0">
+          <a:schemeClr val="accent1"/>
+        </a:effectRef>
+        <a:fontRef idx="minor">
+          <a:schemeClr val="lt1"/>
+        </a:fontRef>
+      </a:style>
+    </a:spDef>
+    <a:lnDef>
+      <a:spPr/>
+      <a:bodyPr/>
+      <a:lstStyle/>
+      <a:style>
+        <a:lnRef idx="2">
+          <a:schemeClr val="accent1"/>
+        </a:lnRef>
+        <a:fillRef idx="0">
+          <a:schemeClr val="accent1"/>
+        </a:fillRef>
+        <a:effectRef idx="1">
+          <a:schemeClr val="accent1"/>
+        </a:effectRef>
+        <a:fontRef idx="minor">
+          <a:schemeClr val="tx1"/>
+        </a:fontRef>
+      </a:style>
+    </a:lnDef>
+  </a:objectDefaults>
+  <a:extraClrSchemeLst/>
+  <a:extLst>
+    <a:ext uri="{05A4C25C-085E-4340-85A3-A5531E510DB2}">
+      <thm15:themeFamily xmlns:thm15="http://schemas.microsoft.com/office/thememl/2012/main" name="Office Theme" id="{2E142A2C-CD16-42D6-873A-C26D2A0506FA}" vid="{1BDDFF52-6CD6-40A5-AB3C-68EB2F1E4D0A}"/>
+    </a:ext>
+  </a:extLst>
+</a:theme>
+</file>
+
+<file path=ppt/theme/theme2.xml><?xml version="1.0" encoding="utf-8"?>
 <a:theme xmlns:a="http://schemas.openxmlformats.org/drawingml/2006/main" name="Office 테마">
   <a:themeElements>
     <a:clrScheme name="Office">
